--- a/docs/SIH26231_FieldProof_HexTech.pptx
+++ b/docs/SIH26231_FieldProof_HexTech.pptx
@@ -4026,8 +4026,8 @@
         </p:nvSpPr>
         <p:spPr>
           <a:xfrm>
-            <a:off x="877824" y="1874519"/>
-            <a:ext cx="6858000" cy="411480"/>
+            <a:off x="2926080" y="1298448"/>
+            <a:ext cx="11704320" cy="457200"/>
           </a:xfrm>
           <a:prstGeom prst="rect">
             <a:avLst/>
@@ -4040,6 +4040,41 @@
           </a:bodyPr>
           <a:lstStyle/>
           <a:p>
+            <a:pPr algn="ctr"/>
+            <a:r>
+              <a:rPr sz="1550" b="1" i="1">
+                <a:solidFill>
+                  <a:srgbClr val="0F766E"/>
+                </a:solidFill>
+                <a:latin typeface="Calibri"/>
+              </a:rPr>
+              <a:t>FieldProof: any phone + a ₹10 colour card = an objective drug-test result, sealed as tamper-proof evidence.</a:t>
+            </a:r>
+          </a:p>
+        </p:txBody>
+      </p:sp>
+      <p:sp>
+        <p:nvSpPr>
+          <p:cNvPr id="21" name="TextBox 20"/>
+          <p:cNvSpPr txBox="1"/>
+          <p:nvPr/>
+        </p:nvSpPr>
+        <p:spPr>
+          <a:xfrm>
+            <a:off x="877824" y="1874519"/>
+            <a:ext cx="6858000" cy="411480"/>
+          </a:xfrm>
+          <a:prstGeom prst="rect">
+            <a:avLst/>
+          </a:prstGeom>
+          <a:noFill/>
+        </p:spPr>
+        <p:txBody>
+          <a:bodyPr wrap="square" anchor="t" lIns="45720" rIns="45720" tIns="18288" bIns="18288">
+            <a:spAutoFit/>
+          </a:bodyPr>
+          <a:lstStyle/>
+          <a:p>
             <a:pPr algn="l"/>
             <a:r>
               <a:rPr sz="2300" b="1" i="0">
@@ -4055,7 +4090,7 @@
       </p:sp>
       <p:sp>
         <p:nvSpPr>
-          <p:cNvPr id="21" name="TextBox 20"/>
+          <p:cNvPr id="22" name="TextBox 21"/>
           <p:cNvSpPr txBox="1"/>
           <p:nvPr/>
         </p:nvSpPr>
@@ -4114,7 +4149,7 @@
       </p:sp>
       <p:sp>
         <p:nvSpPr>
-          <p:cNvPr id="22" name="TextBox 21"/>
+          <p:cNvPr id="23" name="TextBox 22"/>
           <p:cNvSpPr txBox="1"/>
           <p:nvPr/>
         </p:nvSpPr>
@@ -4149,7 +4184,7 @@
       </p:sp>
       <p:sp>
         <p:nvSpPr>
-          <p:cNvPr id="23" name="TextBox 22"/>
+          <p:cNvPr id="24" name="TextBox 23"/>
           <p:cNvSpPr txBox="1"/>
           <p:nvPr/>
         </p:nvSpPr>
@@ -4280,7 +4315,7 @@
       </p:sp>
       <p:sp>
         <p:nvSpPr>
-          <p:cNvPr id="24" name="TextBox 23"/>
+          <p:cNvPr id="25" name="TextBox 24"/>
           <p:cNvSpPr txBox="1"/>
           <p:nvPr/>
         </p:nvSpPr>
@@ -4315,7 +4350,7 @@
       </p:sp>
       <p:sp>
         <p:nvSpPr>
-          <p:cNvPr id="25" name="Rounded Rectangle 24"/>
+          <p:cNvPr id="26" name="Rounded Rectangle 25"/>
           <p:cNvSpPr/>
           <p:nvPr/>
         </p:nvSpPr>
@@ -4384,7 +4419,7 @@
       </p:sp>
       <p:cxnSp>
         <p:nvCxnSpPr>
-          <p:cNvPr id="26" name="Connector 25"/>
+          <p:cNvPr id="27" name="Connector 26"/>
           <p:cNvCxnSpPr/>
           <p:nvPr/>
         </p:nvCxnSpPr>
@@ -4392,41 +4427,6 @@
           <a:xfrm>
             <a:off x="4023360" y="5367528"/>
             <a:ext cx="0" cy="210312"/>
-          </a:xfrm>
-          <a:prstGeom prst="line">
-            <a:avLst/>
-          </a:prstGeom>
-          <a:ln w="22225">
-            <a:solidFill>
-              <a:srgbClr val="B07C5B"/>
-            </a:solidFill>
-          </a:ln>
-        </p:spPr>
-        <p:style>
-          <a:lnRef idx="2">
-            <a:schemeClr val="accent1"/>
-          </a:lnRef>
-          <a:fillRef idx="0">
-            <a:schemeClr val="accent1"/>
-          </a:fillRef>
-          <a:effectRef idx="1">
-            <a:schemeClr val="accent1"/>
-          </a:effectRef>
-          <a:fontRef idx="minor">
-            <a:schemeClr val="tx1"/>
-          </a:fontRef>
-        </p:style>
-      </p:cxnSp>
-      <p:cxnSp>
-        <p:nvCxnSpPr>
-          <p:cNvPr id="27" name="Connector 26"/>
-          <p:cNvCxnSpPr/>
-          <p:nvPr/>
-        </p:nvCxnSpPr>
-        <p:spPr>
-          <a:xfrm>
-            <a:off x="1600200" y="5577840"/>
-            <a:ext cx="4846320" cy="0"/>
           </a:xfrm>
           <a:prstGeom prst="line">
             <a:avLst/>
@@ -4461,6 +4461,41 @@
         <p:spPr>
           <a:xfrm>
             <a:off x="1600200" y="5577840"/>
+            <a:ext cx="4846320" cy="0"/>
+          </a:xfrm>
+          <a:prstGeom prst="line">
+            <a:avLst/>
+          </a:prstGeom>
+          <a:ln w="22225">
+            <a:solidFill>
+              <a:srgbClr val="B07C5B"/>
+            </a:solidFill>
+          </a:ln>
+        </p:spPr>
+        <p:style>
+          <a:lnRef idx="2">
+            <a:schemeClr val="accent1"/>
+          </a:lnRef>
+          <a:fillRef idx="0">
+            <a:schemeClr val="accent1"/>
+          </a:fillRef>
+          <a:effectRef idx="1">
+            <a:schemeClr val="accent1"/>
+          </a:effectRef>
+          <a:fontRef idx="minor">
+            <a:schemeClr val="tx1"/>
+          </a:fontRef>
+        </p:style>
+      </p:cxnSp>
+      <p:cxnSp>
+        <p:nvCxnSpPr>
+          <p:cNvPr id="29" name="Connector 28"/>
+          <p:cNvCxnSpPr/>
+          <p:nvPr/>
+        </p:nvCxnSpPr>
+        <p:spPr>
+          <a:xfrm>
+            <a:off x="1600200" y="5577840"/>
             <a:ext cx="0" cy="228600"/>
           </a:xfrm>
           <a:prstGeom prst="line">
@@ -4490,7 +4525,7 @@
       </p:cxnSp>
       <p:sp>
         <p:nvSpPr>
-          <p:cNvPr id="29" name="Rounded Rectangle 28"/>
+          <p:cNvPr id="30" name="Rounded Rectangle 29"/>
           <p:cNvSpPr/>
           <p:nvPr/>
         </p:nvSpPr>
@@ -4547,7 +4582,7 @@
       </p:sp>
       <p:cxnSp>
         <p:nvCxnSpPr>
-          <p:cNvPr id="30" name="Connector 29"/>
+          <p:cNvPr id="31" name="Connector 30"/>
           <p:cNvCxnSpPr/>
           <p:nvPr/>
         </p:nvCxnSpPr>
@@ -4583,7 +4618,7 @@
       </p:cxnSp>
       <p:sp>
         <p:nvSpPr>
-          <p:cNvPr id="31" name="Rounded Rectangle 30"/>
+          <p:cNvPr id="32" name="Rounded Rectangle 31"/>
           <p:cNvSpPr/>
           <p:nvPr/>
         </p:nvSpPr>
@@ -4640,7 +4675,7 @@
       </p:sp>
       <p:cxnSp>
         <p:nvCxnSpPr>
-          <p:cNvPr id="32" name="Connector 31"/>
+          <p:cNvPr id="33" name="Connector 32"/>
           <p:cNvCxnSpPr/>
           <p:nvPr/>
         </p:nvCxnSpPr>
@@ -4676,7 +4711,7 @@
       </p:cxnSp>
       <p:sp>
         <p:nvSpPr>
-          <p:cNvPr id="33" name="Rounded Rectangle 32"/>
+          <p:cNvPr id="34" name="Rounded Rectangle 33"/>
           <p:cNvSpPr/>
           <p:nvPr/>
         </p:nvSpPr>
@@ -4733,7 +4768,7 @@
       </p:sp>
       <p:cxnSp>
         <p:nvCxnSpPr>
-          <p:cNvPr id="34" name="Connector 33"/>
+          <p:cNvPr id="35" name="Connector 34"/>
           <p:cNvCxnSpPr/>
           <p:nvPr/>
         </p:nvCxnSpPr>
@@ -4769,7 +4804,7 @@
       </p:cxnSp>
       <p:sp>
         <p:nvSpPr>
-          <p:cNvPr id="35" name="Rounded Rectangle 34"/>
+          <p:cNvPr id="36" name="Rounded Rectangle 35"/>
           <p:cNvSpPr/>
           <p:nvPr/>
         </p:nvSpPr>
@@ -4838,7 +4873,7 @@
       </p:sp>
       <p:cxnSp>
         <p:nvCxnSpPr>
-          <p:cNvPr id="36" name="Connector 35"/>
+          <p:cNvPr id="37" name="Connector 36"/>
           <p:cNvCxnSpPr/>
           <p:nvPr/>
         </p:nvCxnSpPr>
@@ -4874,7 +4909,7 @@
       </p:cxnSp>
       <p:sp>
         <p:nvSpPr>
-          <p:cNvPr id="37" name="Rounded Rectangle 36"/>
+          <p:cNvPr id="38" name="Rounded Rectangle 37"/>
           <p:cNvSpPr/>
           <p:nvPr/>
         </p:nvSpPr>
@@ -4943,7 +4978,7 @@
       </p:sp>
       <p:cxnSp>
         <p:nvCxnSpPr>
-          <p:cNvPr id="38" name="Connector 37"/>
+          <p:cNvPr id="39" name="Connector 38"/>
           <p:cNvCxnSpPr/>
           <p:nvPr/>
         </p:nvCxnSpPr>
@@ -4979,7 +5014,7 @@
       </p:cxnSp>
       <p:sp>
         <p:nvSpPr>
-          <p:cNvPr id="39" name="Rounded Rectangle 38"/>
+          <p:cNvPr id="40" name="Rounded Rectangle 39"/>
           <p:cNvSpPr/>
           <p:nvPr/>
         </p:nvSpPr>
@@ -5048,7 +5083,7 @@
       </p:sp>
       <p:cxnSp>
         <p:nvCxnSpPr>
-          <p:cNvPr id="40" name="Connector 39"/>
+          <p:cNvPr id="41" name="Connector 40"/>
           <p:cNvCxnSpPr/>
           <p:nvPr/>
         </p:nvCxnSpPr>
@@ -5084,7 +5119,7 @@
       </p:cxnSp>
       <p:sp>
         <p:nvSpPr>
-          <p:cNvPr id="41" name="Rounded Rectangle 40"/>
+          <p:cNvPr id="42" name="Rounded Rectangle 41"/>
           <p:cNvSpPr/>
           <p:nvPr/>
         </p:nvSpPr>
@@ -5153,7 +5188,7 @@
       </p:sp>
       <p:cxnSp>
         <p:nvCxnSpPr>
-          <p:cNvPr id="42" name="Connector 41"/>
+          <p:cNvPr id="43" name="Connector 42"/>
           <p:cNvCxnSpPr/>
           <p:nvPr/>
         </p:nvCxnSpPr>
@@ -5189,7 +5224,7 @@
       </p:cxnSp>
       <p:sp>
         <p:nvSpPr>
-          <p:cNvPr id="43" name="Rounded Rectangle 42"/>
+          <p:cNvPr id="44" name="Rounded Rectangle 43"/>
           <p:cNvSpPr/>
           <p:nvPr/>
         </p:nvSpPr>
@@ -5258,7 +5293,7 @@
       </p:sp>
       <p:cxnSp>
         <p:nvCxnSpPr>
-          <p:cNvPr id="44" name="Connector 43"/>
+          <p:cNvPr id="45" name="Connector 44"/>
           <p:cNvCxnSpPr/>
           <p:nvPr/>
         </p:nvCxnSpPr>
@@ -5294,7 +5329,7 @@
       </p:cxnSp>
       <p:sp>
         <p:nvSpPr>
-          <p:cNvPr id="45" name="Rounded Rectangle 44"/>
+          <p:cNvPr id="46" name="Rounded Rectangle 45"/>
           <p:cNvSpPr/>
           <p:nvPr/>
         </p:nvSpPr>
@@ -5363,7 +5398,7 @@
       </p:sp>
       <p:cxnSp>
         <p:nvCxnSpPr>
-          <p:cNvPr id="46" name="Connector 45"/>
+          <p:cNvPr id="47" name="Connector 46"/>
           <p:cNvCxnSpPr/>
           <p:nvPr/>
         </p:nvCxnSpPr>
@@ -5399,7 +5434,7 @@
       </p:cxnSp>
       <p:sp>
         <p:nvSpPr>
-          <p:cNvPr id="47" name="Rounded Rectangle 46"/>
+          <p:cNvPr id="48" name="Rounded Rectangle 47"/>
           <p:cNvSpPr/>
           <p:nvPr/>
         </p:nvSpPr>
@@ -5468,7 +5503,7 @@
       </p:sp>
       <p:cxnSp>
         <p:nvCxnSpPr>
-          <p:cNvPr id="48" name="Connector 47"/>
+          <p:cNvPr id="49" name="Connector 48"/>
           <p:cNvCxnSpPr/>
           <p:nvPr/>
         </p:nvCxnSpPr>
@@ -5504,7 +5539,7 @@
       </p:cxnSp>
       <p:sp>
         <p:nvSpPr>
-          <p:cNvPr id="49" name="Rounded Rectangle 48"/>
+          <p:cNvPr id="50" name="Rounded Rectangle 49"/>
           <p:cNvSpPr/>
           <p:nvPr/>
         </p:nvSpPr>
@@ -5573,7 +5608,7 @@
       </p:sp>
       <p:cxnSp>
         <p:nvCxnSpPr>
-          <p:cNvPr id="50" name="Connector 49"/>
+          <p:cNvPr id="51" name="Connector 50"/>
           <p:cNvCxnSpPr/>
           <p:nvPr/>
         </p:nvCxnSpPr>
@@ -5609,7 +5644,7 @@
       </p:cxnSp>
       <p:sp>
         <p:nvSpPr>
-          <p:cNvPr id="51" name="Rounded Rectangle 50"/>
+          <p:cNvPr id="52" name="Rounded Rectangle 51"/>
           <p:cNvSpPr/>
           <p:nvPr/>
         </p:nvSpPr>
@@ -5678,7 +5713,7 @@
       </p:sp>
       <p:cxnSp>
         <p:nvCxnSpPr>
-          <p:cNvPr id="52" name="Connector 51"/>
+          <p:cNvPr id="53" name="Connector 52"/>
           <p:cNvCxnSpPr/>
           <p:nvPr/>
         </p:nvCxnSpPr>
@@ -5686,42 +5721,6 @@
           <a:xfrm>
             <a:off x="1600200" y="8686800"/>
             <a:ext cx="0" cy="365760"/>
-          </a:xfrm>
-          <a:prstGeom prst="line">
-            <a:avLst/>
-          </a:prstGeom>
-          <a:ln w="22225">
-            <a:solidFill>
-              <a:srgbClr val="B07C5B"/>
-            </a:solidFill>
-            <a:prstDash val="dash"/>
-          </a:ln>
-        </p:spPr>
-        <p:style>
-          <a:lnRef idx="2">
-            <a:schemeClr val="accent1"/>
-          </a:lnRef>
-          <a:fillRef idx="0">
-            <a:schemeClr val="accent1"/>
-          </a:fillRef>
-          <a:effectRef idx="1">
-            <a:schemeClr val="accent1"/>
-          </a:effectRef>
-          <a:fontRef idx="minor">
-            <a:schemeClr val="tx1"/>
-          </a:fontRef>
-        </p:style>
-      </p:cxnSp>
-      <p:cxnSp>
-        <p:nvCxnSpPr>
-          <p:cNvPr id="53" name="Connector 52"/>
-          <p:cNvCxnSpPr/>
-          <p:nvPr/>
-        </p:nvCxnSpPr>
-        <p:spPr>
-          <a:xfrm>
-            <a:off x="1600200" y="9052560"/>
-            <a:ext cx="1216152" cy="0"/>
           </a:xfrm>
           <a:prstGeom prst="line">
             <a:avLst/>
@@ -5755,9 +5754,9 @@
           <p:nvPr/>
         </p:nvCxnSpPr>
         <p:spPr>
-          <a:xfrm flipV="1">
-            <a:off x="2816352" y="6858000"/>
-            <a:ext cx="0" cy="2194560"/>
+          <a:xfrm>
+            <a:off x="1600200" y="9052560"/>
+            <a:ext cx="1216152" cy="0"/>
           </a:xfrm>
           <a:prstGeom prst="line">
             <a:avLst/>
@@ -5791,6 +5790,42 @@
           <p:nvPr/>
         </p:nvCxnSpPr>
         <p:spPr>
+          <a:xfrm flipV="1">
+            <a:off x="2816352" y="6858000"/>
+            <a:ext cx="0" cy="2194560"/>
+          </a:xfrm>
+          <a:prstGeom prst="line">
+            <a:avLst/>
+          </a:prstGeom>
+          <a:ln w="22225">
+            <a:solidFill>
+              <a:srgbClr val="B07C5B"/>
+            </a:solidFill>
+            <a:prstDash val="dash"/>
+          </a:ln>
+        </p:spPr>
+        <p:style>
+          <a:lnRef idx="2">
+            <a:schemeClr val="accent1"/>
+          </a:lnRef>
+          <a:fillRef idx="0">
+            <a:schemeClr val="accent1"/>
+          </a:fillRef>
+          <a:effectRef idx="1">
+            <a:schemeClr val="accent1"/>
+          </a:effectRef>
+          <a:fontRef idx="minor">
+            <a:schemeClr val="tx1"/>
+          </a:fontRef>
+        </p:style>
+      </p:cxnSp>
+      <p:cxnSp>
+        <p:nvCxnSpPr>
+          <p:cNvPr id="56" name="Connector 55"/>
+          <p:cNvCxnSpPr/>
+          <p:nvPr/>
+        </p:nvCxnSpPr>
+        <p:spPr>
           <a:xfrm>
             <a:off x="2816352" y="6858000"/>
             <a:ext cx="155448" cy="0"/>
@@ -5823,7 +5858,7 @@
       </p:cxnSp>
       <p:sp>
         <p:nvSpPr>
-          <p:cNvPr id="56" name="Rounded Rectangle 55"/>
+          <p:cNvPr id="57" name="Rounded Rectangle 56"/>
           <p:cNvSpPr/>
           <p:nvPr/>
         </p:nvSpPr>
@@ -5881,7 +5916,7 @@
       </p:sp>
       <p:sp>
         <p:nvSpPr>
-          <p:cNvPr id="57" name="TextBox 56"/>
+          <p:cNvPr id="58" name="TextBox 57"/>
           <p:cNvSpPr txBox="1"/>
           <p:nvPr/>
         </p:nvSpPr>
@@ -5916,7 +5951,7 @@
       </p:sp>
       <p:sp>
         <p:nvSpPr>
-          <p:cNvPr id="58" name="Rounded Rectangle 57"/>
+          <p:cNvPr id="59" name="Rounded Rectangle 58"/>
           <p:cNvSpPr/>
           <p:nvPr/>
         </p:nvSpPr>
@@ -5985,7 +6020,7 @@
       </p:sp>
       <p:sp>
         <p:nvSpPr>
-          <p:cNvPr id="59" name="Rounded Rectangle 58"/>
+          <p:cNvPr id="60" name="Rounded Rectangle 59"/>
           <p:cNvSpPr/>
           <p:nvPr/>
         </p:nvSpPr>
@@ -6054,7 +6089,7 @@
       </p:sp>
       <p:sp>
         <p:nvSpPr>
-          <p:cNvPr id="60" name="Rounded Rectangle 59"/>
+          <p:cNvPr id="61" name="Rounded Rectangle 60"/>
           <p:cNvSpPr/>
           <p:nvPr/>
         </p:nvSpPr>
@@ -6123,7 +6158,7 @@
       </p:sp>
       <p:sp>
         <p:nvSpPr>
-          <p:cNvPr id="61" name="Diamond 60"/>
+          <p:cNvPr id="62" name="Diamond 61"/>
           <p:cNvSpPr/>
           <p:nvPr/>
         </p:nvSpPr>
@@ -6190,49 +6225,13 @@
       </p:sp>
       <p:cxnSp>
         <p:nvCxnSpPr>
-          <p:cNvPr id="62" name="Connector 61"/>
-          <p:cNvCxnSpPr/>
-          <p:nvPr/>
-        </p:nvCxnSpPr>
-        <p:spPr>
-          <a:xfrm>
-            <a:off x="9966960" y="5769864"/>
-            <a:ext cx="228600" cy="0"/>
-          </a:xfrm>
-          <a:prstGeom prst="line">
-            <a:avLst/>
-          </a:prstGeom>
-          <a:ln w="22225">
-            <a:solidFill>
-              <a:srgbClr val="7F7F7F"/>
-            </a:solidFill>
-            <a:tailEnd type="triangle" w="med" h="med"/>
-          </a:ln>
-        </p:spPr>
-        <p:style>
-          <a:lnRef idx="2">
-            <a:schemeClr val="accent1"/>
-          </a:lnRef>
-          <a:fillRef idx="0">
-            <a:schemeClr val="accent1"/>
-          </a:fillRef>
-          <a:effectRef idx="1">
-            <a:schemeClr val="accent1"/>
-          </a:effectRef>
-          <a:fontRef idx="minor">
-            <a:schemeClr val="tx1"/>
-          </a:fontRef>
-        </p:style>
-      </p:cxnSp>
-      <p:cxnSp>
-        <p:nvCxnSpPr>
           <p:cNvPr id="63" name="Connector 62"/>
           <p:cNvCxnSpPr/>
           <p:nvPr/>
         </p:nvCxnSpPr>
         <p:spPr>
           <a:xfrm>
-            <a:off x="11932920" y="5769864"/>
+            <a:off x="9966960" y="5769864"/>
             <a:ext cx="228600" cy="0"/>
           </a:xfrm>
           <a:prstGeom prst="line">
@@ -6268,7 +6267,7 @@
         </p:nvCxnSpPr>
         <p:spPr>
           <a:xfrm>
-            <a:off x="13898880" y="5769864"/>
+            <a:off x="11932920" y="5769864"/>
             <a:ext cx="228600" cy="0"/>
           </a:xfrm>
           <a:prstGeom prst="line">
@@ -6296,9 +6295,45 @@
           </a:fontRef>
         </p:style>
       </p:cxnSp>
-      <p:sp>
-        <p:nvSpPr>
-          <p:cNvPr id="65" name="Rounded Rectangle 64"/>
+      <p:cxnSp>
+        <p:nvCxnSpPr>
+          <p:cNvPr id="65" name="Connector 64"/>
+          <p:cNvCxnSpPr/>
+          <p:nvPr/>
+        </p:nvCxnSpPr>
+        <p:spPr>
+          <a:xfrm>
+            <a:off x="13898880" y="5769864"/>
+            <a:ext cx="228600" cy="0"/>
+          </a:xfrm>
+          <a:prstGeom prst="line">
+            <a:avLst/>
+          </a:prstGeom>
+          <a:ln w="22225">
+            <a:solidFill>
+              <a:srgbClr val="7F7F7F"/>
+            </a:solidFill>
+            <a:tailEnd type="triangle" w="med" h="med"/>
+          </a:ln>
+        </p:spPr>
+        <p:style>
+          <a:lnRef idx="2">
+            <a:schemeClr val="accent1"/>
+          </a:lnRef>
+          <a:fillRef idx="0">
+            <a:schemeClr val="accent1"/>
+          </a:fillRef>
+          <a:effectRef idx="1">
+            <a:schemeClr val="accent1"/>
+          </a:effectRef>
+          <a:fontRef idx="minor">
+            <a:schemeClr val="tx1"/>
+          </a:fontRef>
+        </p:style>
+      </p:cxnSp>
+      <p:sp>
+        <p:nvSpPr>
+          <p:cNvPr id="66" name="Rounded Rectangle 65"/>
           <p:cNvSpPr/>
           <p:nvPr/>
         </p:nvSpPr>
@@ -6356,7 +6391,7 @@
       </p:sp>
       <p:sp>
         <p:nvSpPr>
-          <p:cNvPr id="66" name="Rounded Rectangle 65"/>
+          <p:cNvPr id="67" name="Rounded Rectangle 66"/>
           <p:cNvSpPr/>
           <p:nvPr/>
         </p:nvSpPr>
@@ -6414,7 +6449,7 @@
       </p:sp>
       <p:cxnSp>
         <p:nvCxnSpPr>
-          <p:cNvPr id="67" name="Connector 66"/>
+          <p:cNvPr id="68" name="Connector 67"/>
           <p:cNvCxnSpPr/>
           <p:nvPr/>
         </p:nvCxnSpPr>
@@ -6422,41 +6457,6 @@
           <a:xfrm>
             <a:off x="14973300" y="6327648"/>
             <a:ext cx="0" cy="256032"/>
-          </a:xfrm>
-          <a:prstGeom prst="line">
-            <a:avLst/>
-          </a:prstGeom>
-          <a:ln w="22225">
-            <a:solidFill>
-              <a:srgbClr val="7F7F7F"/>
-            </a:solidFill>
-          </a:ln>
-        </p:spPr>
-        <p:style>
-          <a:lnRef idx="2">
-            <a:schemeClr val="accent1"/>
-          </a:lnRef>
-          <a:fillRef idx="0">
-            <a:schemeClr val="accent1"/>
-          </a:fillRef>
-          <a:effectRef idx="1">
-            <a:schemeClr val="accent1"/>
-          </a:effectRef>
-          <a:fontRef idx="minor">
-            <a:schemeClr val="tx1"/>
-          </a:fontRef>
-        </p:style>
-      </p:cxnSp>
-      <p:cxnSp>
-        <p:nvCxnSpPr>
-          <p:cNvPr id="68" name="Connector 67"/>
-          <p:cNvCxnSpPr/>
-          <p:nvPr/>
-        </p:nvCxnSpPr>
-        <p:spPr>
-          <a:xfrm>
-            <a:off x="13670280" y="6583680"/>
-            <a:ext cx="3337560" cy="0"/>
           </a:xfrm>
           <a:prstGeom prst="line">
             <a:avLst/>
@@ -6491,6 +6491,41 @@
         <p:spPr>
           <a:xfrm>
             <a:off x="13670280" y="6583680"/>
+            <a:ext cx="3337560" cy="0"/>
+          </a:xfrm>
+          <a:prstGeom prst="line">
+            <a:avLst/>
+          </a:prstGeom>
+          <a:ln w="22225">
+            <a:solidFill>
+              <a:srgbClr val="7F7F7F"/>
+            </a:solidFill>
+          </a:ln>
+        </p:spPr>
+        <p:style>
+          <a:lnRef idx="2">
+            <a:schemeClr val="accent1"/>
+          </a:lnRef>
+          <a:fillRef idx="0">
+            <a:schemeClr val="accent1"/>
+          </a:fillRef>
+          <a:effectRef idx="1">
+            <a:schemeClr val="accent1"/>
+          </a:effectRef>
+          <a:fontRef idx="minor">
+            <a:schemeClr val="tx1"/>
+          </a:fontRef>
+        </p:style>
+      </p:cxnSp>
+      <p:cxnSp>
+        <p:nvCxnSpPr>
+          <p:cNvPr id="70" name="Connector 69"/>
+          <p:cNvCxnSpPr/>
+          <p:nvPr/>
+        </p:nvCxnSpPr>
+        <p:spPr>
+          <a:xfrm>
+            <a:off x="13670280" y="6583680"/>
             <a:ext cx="0" cy="228600"/>
           </a:xfrm>
           <a:prstGeom prst="line">
@@ -6520,7 +6555,7 @@
       </p:cxnSp>
       <p:sp>
         <p:nvSpPr>
-          <p:cNvPr id="70" name="Oval 69"/>
+          <p:cNvPr id="71" name="Oval 70"/>
           <p:cNvSpPr/>
           <p:nvPr/>
         </p:nvSpPr>
@@ -6575,7 +6610,7 @@
       </p:sp>
       <p:cxnSp>
         <p:nvCxnSpPr>
-          <p:cNvPr id="71" name="Connector 70"/>
+          <p:cNvPr id="72" name="Connector 71"/>
           <p:cNvCxnSpPr/>
           <p:nvPr/>
         </p:nvCxnSpPr>
@@ -6611,7 +6646,7 @@
       </p:cxnSp>
       <p:sp>
         <p:nvSpPr>
-          <p:cNvPr id="72" name="Oval 71"/>
+          <p:cNvPr id="73" name="Oval 72"/>
           <p:cNvSpPr/>
           <p:nvPr/>
         </p:nvSpPr>
@@ -6666,7 +6701,7 @@
       </p:sp>
       <p:cxnSp>
         <p:nvCxnSpPr>
-          <p:cNvPr id="73" name="Connector 72"/>
+          <p:cNvPr id="74" name="Connector 73"/>
           <p:cNvCxnSpPr/>
           <p:nvPr/>
         </p:nvCxnSpPr>
@@ -6702,7 +6737,7 @@
       </p:cxnSp>
       <p:sp>
         <p:nvSpPr>
-          <p:cNvPr id="74" name="Oval 73"/>
+          <p:cNvPr id="75" name="Oval 74"/>
           <p:cNvSpPr/>
           <p:nvPr/>
         </p:nvSpPr>
@@ -6769,7 +6804,7 @@
       </p:sp>
       <p:sp>
         <p:nvSpPr>
-          <p:cNvPr id="75" name="Rounded Rectangle 74"/>
+          <p:cNvPr id="76" name="Rounded Rectangle 75"/>
           <p:cNvSpPr/>
           <p:nvPr/>
         </p:nvSpPr>
@@ -6838,7 +6873,7 @@
       </p:sp>
       <p:sp>
         <p:nvSpPr>
-          <p:cNvPr id="76" name="Rounded Rectangle 75"/>
+          <p:cNvPr id="77" name="Rounded Rectangle 76"/>
           <p:cNvSpPr/>
           <p:nvPr/>
         </p:nvSpPr>
@@ -6907,49 +6942,13 @@
       </p:sp>
       <p:cxnSp>
         <p:nvCxnSpPr>
-          <p:cNvPr id="77" name="Connector 76"/>
-          <p:cNvCxnSpPr/>
-          <p:nvPr/>
-        </p:nvCxnSpPr>
-        <p:spPr>
-          <a:xfrm>
-            <a:off x="13670280" y="7315200"/>
-            <a:ext cx="0" cy="411479"/>
-          </a:xfrm>
-          <a:prstGeom prst="line">
-            <a:avLst/>
-          </a:prstGeom>
-          <a:ln w="22225">
-            <a:solidFill>
-              <a:srgbClr val="7F7F7F"/>
-            </a:solidFill>
-            <a:tailEnd type="triangle" w="med" h="med"/>
-          </a:ln>
-        </p:spPr>
-        <p:style>
-          <a:lnRef idx="2">
-            <a:schemeClr val="accent1"/>
-          </a:lnRef>
-          <a:fillRef idx="0">
-            <a:schemeClr val="accent1"/>
-          </a:fillRef>
-          <a:effectRef idx="1">
-            <a:schemeClr val="accent1"/>
-          </a:effectRef>
-          <a:fontRef idx="minor">
-            <a:schemeClr val="tx1"/>
-          </a:fontRef>
-        </p:style>
-      </p:cxnSp>
-      <p:cxnSp>
-        <p:nvCxnSpPr>
           <p:cNvPr id="78" name="Connector 77"/>
           <p:cNvCxnSpPr/>
           <p:nvPr/>
         </p:nvCxnSpPr>
         <p:spPr>
           <a:xfrm>
-            <a:off x="15361920" y="7315200"/>
+            <a:off x="13670280" y="7315200"/>
             <a:ext cx="0" cy="411479"/>
           </a:xfrm>
           <a:prstGeom prst="line">
@@ -6985,7 +6984,7 @@
         </p:nvCxnSpPr>
         <p:spPr>
           <a:xfrm>
-            <a:off x="17007840" y="7315200"/>
+            <a:off x="15361920" y="7315200"/>
             <a:ext cx="0" cy="411479"/>
           </a:xfrm>
           <a:prstGeom prst="line">
@@ -7013,9 +7012,45 @@
           </a:fontRef>
         </p:style>
       </p:cxnSp>
-      <p:sp>
-        <p:nvSpPr>
-          <p:cNvPr id="80" name="Rounded Rectangle 79"/>
+      <p:cxnSp>
+        <p:nvCxnSpPr>
+          <p:cNvPr id="80" name="Connector 79"/>
+          <p:cNvCxnSpPr/>
+          <p:nvPr/>
+        </p:nvCxnSpPr>
+        <p:spPr>
+          <a:xfrm>
+            <a:off x="17007840" y="7315200"/>
+            <a:ext cx="0" cy="411479"/>
+          </a:xfrm>
+          <a:prstGeom prst="line">
+            <a:avLst/>
+          </a:prstGeom>
+          <a:ln w="22225">
+            <a:solidFill>
+              <a:srgbClr val="7F7F7F"/>
+            </a:solidFill>
+            <a:tailEnd type="triangle" w="med" h="med"/>
+          </a:ln>
+        </p:spPr>
+        <p:style>
+          <a:lnRef idx="2">
+            <a:schemeClr val="accent1"/>
+          </a:lnRef>
+          <a:fillRef idx="0">
+            <a:schemeClr val="accent1"/>
+          </a:fillRef>
+          <a:effectRef idx="1">
+            <a:schemeClr val="accent1"/>
+          </a:effectRef>
+          <a:fontRef idx="minor">
+            <a:schemeClr val="tx1"/>
+          </a:fontRef>
+        </p:style>
+      </p:cxnSp>
+      <p:sp>
+        <p:nvSpPr>
+          <p:cNvPr id="81" name="Rounded Rectangle 80"/>
           <p:cNvSpPr/>
           <p:nvPr/>
         </p:nvSpPr>
@@ -7072,7 +7107,7 @@
       </p:sp>
       <p:cxnSp>
         <p:nvCxnSpPr>
-          <p:cNvPr id="81" name="Connector 80"/>
+          <p:cNvPr id="82" name="Connector 81"/>
           <p:cNvCxnSpPr/>
           <p:nvPr/>
         </p:nvCxnSpPr>
@@ -7089,41 +7124,6 @@
               <a:srgbClr val="7F7F7F"/>
             </a:solidFill>
             <a:tailEnd type="triangle" w="med" h="med"/>
-          </a:ln>
-        </p:spPr>
-        <p:style>
-          <a:lnRef idx="2">
-            <a:schemeClr val="accent1"/>
-          </a:lnRef>
-          <a:fillRef idx="0">
-            <a:schemeClr val="accent1"/>
-          </a:fillRef>
-          <a:effectRef idx="1">
-            <a:schemeClr val="accent1"/>
-          </a:effectRef>
-          <a:fontRef idx="minor">
-            <a:schemeClr val="tx1"/>
-          </a:fontRef>
-        </p:style>
-      </p:cxnSp>
-      <p:cxnSp>
-        <p:nvCxnSpPr>
-          <p:cNvPr id="82" name="Connector 81"/>
-          <p:cNvCxnSpPr/>
-          <p:nvPr/>
-        </p:nvCxnSpPr>
-        <p:spPr>
-          <a:xfrm>
-            <a:off x="17007840" y="8366760"/>
-            <a:ext cx="0" cy="594360"/>
-          </a:xfrm>
-          <a:prstGeom prst="line">
-            <a:avLst/>
-          </a:prstGeom>
-          <a:ln w="22225">
-            <a:solidFill>
-              <a:srgbClr val="7F7F7F"/>
-            </a:solidFill>
           </a:ln>
         </p:spPr>
         <p:style>
@@ -7148,6 +7148,41 @@
           <p:nvPr/>
         </p:nvCxnSpPr>
         <p:spPr>
+          <a:xfrm>
+            <a:off x="17007840" y="8366760"/>
+            <a:ext cx="0" cy="594360"/>
+          </a:xfrm>
+          <a:prstGeom prst="line">
+            <a:avLst/>
+          </a:prstGeom>
+          <a:ln w="22225">
+            <a:solidFill>
+              <a:srgbClr val="7F7F7F"/>
+            </a:solidFill>
+          </a:ln>
+        </p:spPr>
+        <p:style>
+          <a:lnRef idx="2">
+            <a:schemeClr val="accent1"/>
+          </a:lnRef>
+          <a:fillRef idx="0">
+            <a:schemeClr val="accent1"/>
+          </a:fillRef>
+          <a:effectRef idx="1">
+            <a:schemeClr val="accent1"/>
+          </a:effectRef>
+          <a:fontRef idx="minor">
+            <a:schemeClr val="tx1"/>
+          </a:fontRef>
+        </p:style>
+      </p:cxnSp>
+      <p:cxnSp>
+        <p:nvCxnSpPr>
+          <p:cNvPr id="84" name="Connector 83"/>
+          <p:cNvCxnSpPr/>
+          <p:nvPr/>
+        </p:nvCxnSpPr>
+        <p:spPr>
           <a:xfrm flipH="1">
             <a:off x="16139159" y="8961120"/>
             <a:ext cx="868681" cy="0"/>
@@ -7179,7 +7214,7 @@
       </p:cxnSp>
       <p:sp>
         <p:nvSpPr>
-          <p:cNvPr id="84" name="Rounded Rectangle 83"/>
+          <p:cNvPr id="85" name="Rounded Rectangle 84"/>
           <p:cNvSpPr/>
           <p:nvPr/>
         </p:nvSpPr>
@@ -7236,7 +7271,7 @@
       </p:sp>
       <p:sp>
         <p:nvSpPr>
-          <p:cNvPr id="85" name="TextBox 84"/>
+          <p:cNvPr id="86" name="TextBox 85"/>
           <p:cNvSpPr txBox="1"/>
           <p:nvPr/>
         </p:nvSpPr>
@@ -7264,14 +7299,14 @@
                 </a:solidFill>
                 <a:latin typeface="Calibri"/>
               </a:rPr>
-              <a:t>RESULT SCREEN (what the officer sees)</a:t>
-            </a:r>
-          </a:p>
-        </p:txBody>
-      </p:sp>
-      <p:sp>
-        <p:nvSpPr>
-          <p:cNvPr id="86" name="Rounded Rectangle 85"/>
+              <a:t>REAL RESULT from our phone test (28 Sep)</a:t>
+            </a:r>
+          </a:p>
+        </p:txBody>
+      </p:sp>
+      <p:sp>
+        <p:nvSpPr>
+          <p:cNvPr id="87" name="Rounded Rectangle 86"/>
           <p:cNvSpPr/>
           <p:nvPr/>
         </p:nvSpPr>
@@ -7321,14 +7356,14 @@
                 </a:solidFill>
                 <a:latin typeface="Calibri"/>
               </a:rPr>
-              <a:t>POSITIVE · opium-type drug · 91% sure</a:t>
-            </a:r>
-          </a:p>
-        </p:txBody>
-      </p:sp>
-      <p:sp>
-        <p:nvSpPr>
-          <p:cNvPr id="87" name="TextBox 86"/>
+              <a:t>POSITIVE · opium-type drug · 75% sure</a:t>
+            </a:r>
+          </a:p>
+        </p:txBody>
+      </p:sp>
+      <p:sp>
+        <p:nvSpPr>
+          <p:cNvPr id="88" name="TextBox 87"/>
           <p:cNvSpPr txBox="1"/>
           <p:nvPr/>
         </p:nvSpPr>
@@ -7356,14 +7391,14 @@
                 </a:solidFill>
                 <a:latin typeface="Calibri"/>
               </a:rPr>
-              <a:t>Colour difference = 4.2 (small number = close match)</a:t>
-            </a:r>
-          </a:p>
-        </p:txBody>
-      </p:sp>
-      <p:sp>
-        <p:nvSpPr>
-          <p:cNvPr id="88" name="Rounded Rectangle 87"/>
+              <a:t>Colour difference = 6.8 (small number = close match)</a:t>
+            </a:r>
+          </a:p>
+        </p:txBody>
+      </p:sp>
+      <p:sp>
+        <p:nvSpPr>
+          <p:cNvPr id="89" name="Rounded Rectangle 88"/>
           <p:cNvSpPr/>
           <p:nvPr/>
         </p:nvSpPr>
@@ -7409,7 +7444,7 @@
       </p:sp>
       <p:sp>
         <p:nvSpPr>
-          <p:cNvPr id="89" name="TextBox 88"/>
+          <p:cNvPr id="90" name="TextBox 89"/>
           <p:cNvSpPr txBox="1"/>
           <p:nvPr/>
         </p:nvSpPr>
@@ -7456,7 +7491,7 @@
       </p:sp>
       <p:sp>
         <p:nvSpPr>
-          <p:cNvPr id="90" name="Rounded Rectangle 89"/>
+          <p:cNvPr id="91" name="Rounded Rectangle 90"/>
           <p:cNvSpPr/>
           <p:nvPr/>
         </p:nvSpPr>
@@ -7502,7 +7537,7 @@
       </p:sp>
       <p:sp>
         <p:nvSpPr>
-          <p:cNvPr id="91" name="TextBox 90"/>
+          <p:cNvPr id="92" name="TextBox 91"/>
           <p:cNvSpPr txBox="1"/>
           <p:nvPr/>
         </p:nvSpPr>
@@ -7549,7 +7584,7 @@
       </p:sp>
       <p:sp>
         <p:nvSpPr>
-          <p:cNvPr id="92" name="Rounded Rectangle 91"/>
+          <p:cNvPr id="93" name="Rounded Rectangle 92"/>
           <p:cNvSpPr/>
           <p:nvPr/>
         </p:nvSpPr>
@@ -7595,7 +7630,7 @@
       </p:sp>
       <p:sp>
         <p:nvSpPr>
-          <p:cNvPr id="93" name="TextBox 92"/>
+          <p:cNvPr id="94" name="TextBox 93"/>
           <p:cNvSpPr txBox="1"/>
           <p:nvPr/>
         </p:nvSpPr>
@@ -7642,7 +7677,7 @@
       </p:sp>
       <p:sp>
         <p:nvSpPr>
-          <p:cNvPr id="94" name="TextBox 93"/>
+          <p:cNvPr id="95" name="TextBox 94"/>
           <p:cNvSpPr txBox="1"/>
           <p:nvPr/>
         </p:nvSpPr>
@@ -9210,8 +9245,8 @@
         </p:nvSpPr>
         <p:spPr>
           <a:xfrm>
-            <a:off x="12024360" y="2148840"/>
-            <a:ext cx="5394960" cy="411480"/>
+            <a:off x="11978640" y="2103120"/>
+            <a:ext cx="5486400" cy="411480"/>
           </a:xfrm>
           <a:prstGeom prst="rect">
             <a:avLst/>
@@ -9226,205 +9261,821 @@
           <a:p>
             <a:pPr algn="l"/>
             <a:r>
-              <a:rPr sz="2100" b="1" i="0">
+              <a:rPr sz="1800" b="1" i="0">
                 <a:solidFill>
                   <a:srgbClr val="1F3864"/>
                 </a:solidFill>
                 <a:latin typeface="Calibri"/>
               </a:rPr>
-              <a:t>How the App Decides</a:t>
-            </a:r>
-          </a:p>
-        </p:txBody>
-      </p:sp>
-      <p:sp>
-        <p:nvSpPr>
-          <p:cNvPr id="50" name="TextBox 49"/>
-          <p:cNvSpPr txBox="1"/>
-          <p:nvPr/>
-        </p:nvSpPr>
-        <p:spPr>
-          <a:xfrm>
-            <a:off x="12024360" y="2606040"/>
-            <a:ext cx="5486400" cy="2651760"/>
-          </a:xfrm>
-          <a:prstGeom prst="rect">
+              <a:t>How the App Decides (never guesses)</a:t>
+            </a:r>
+          </a:p>
+        </p:txBody>
+      </p:sp>
+      <p:sp>
+        <p:nvSpPr>
+          <p:cNvPr id="50" name="Rounded Rectangle 49"/>
+          <p:cNvSpPr/>
+          <p:nvPr/>
+        </p:nvSpPr>
+        <p:spPr>
+          <a:xfrm>
+            <a:off x="12024360" y="2560320"/>
+            <a:ext cx="3794760" cy="402336"/>
+          </a:xfrm>
+          <a:prstGeom prst="roundRect">
+            <a:avLst>
+              <a:gd name="adj" fmla="val 12000"/>
+            </a:avLst>
+          </a:prstGeom>
+          <a:solidFill>
+            <a:srgbClr val="FFFFFF"/>
+          </a:solidFill>
+          <a:ln w="15875">
+            <a:solidFill>
+              <a:srgbClr val="2F5597"/>
+            </a:solidFill>
+          </a:ln>
+          <a:effectLst/>
+        </p:spPr>
+        <p:style>
+          <a:lnRef idx="1">
+            <a:schemeClr val="accent1"/>
+          </a:lnRef>
+          <a:fillRef idx="3">
+            <a:schemeClr val="accent1"/>
+          </a:fillRef>
+          <a:effectRef idx="2">
+            <a:schemeClr val="accent1"/>
+          </a:effectRef>
+          <a:fontRef idx="minor">
+            <a:schemeClr val="lt1"/>
+          </a:fontRef>
+        </p:style>
+        <p:txBody>
+          <a:bodyPr rtlCol="0" anchor="ctr" wrap="square" lIns="45720" rIns="45720" tIns="18288" bIns="18288"/>
+          <a:lstStyle/>
+          <a:p>
+            <a:pPr algn="ctr"/>
+            <a:r>
+              <a:rPr sz="1150" b="1">
+                <a:solidFill>
+                  <a:srgbClr val="1A1A1A"/>
+                </a:solidFill>
+                <a:latin typeface="Calibri"/>
+              </a:rPr>
+              <a:t>1. All 4 card corners found?</a:t>
+            </a:r>
+          </a:p>
+        </p:txBody>
+      </p:sp>
+      <p:cxnSp>
+        <p:nvCxnSpPr>
+          <p:cNvPr id="51" name="Connector 50"/>
+          <p:cNvCxnSpPr/>
+          <p:nvPr/>
+        </p:nvCxnSpPr>
+        <p:spPr>
+          <a:xfrm>
+            <a:off x="15819120" y="2761488"/>
+            <a:ext cx="228600" cy="0"/>
+          </a:xfrm>
+          <a:prstGeom prst="line">
             <a:avLst/>
           </a:prstGeom>
-          <a:noFill/>
-        </p:spPr>
-        <p:txBody>
-          <a:bodyPr wrap="square" lIns="45720" rIns="45720">
-            <a:spAutoFit/>
-          </a:bodyPr>
+          <a:ln w="22225">
+            <a:solidFill>
+              <a:srgbClr val="7030A0"/>
+            </a:solidFill>
+            <a:tailEnd type="triangle" w="med" h="med"/>
+          </a:ln>
+        </p:spPr>
+        <p:style>
+          <a:lnRef idx="2">
+            <a:schemeClr val="accent1"/>
+          </a:lnRef>
+          <a:fillRef idx="0">
+            <a:schemeClr val="accent1"/>
+          </a:fillRef>
+          <a:effectRef idx="1">
+            <a:schemeClr val="accent1"/>
+          </a:effectRef>
+          <a:fontRef idx="minor">
+            <a:schemeClr val="tx1"/>
+          </a:fontRef>
+        </p:style>
+      </p:cxnSp>
+      <p:sp>
+        <p:nvSpPr>
+          <p:cNvPr id="52" name="Rounded Rectangle 51"/>
+          <p:cNvSpPr/>
+          <p:nvPr/>
+        </p:nvSpPr>
+        <p:spPr>
+          <a:xfrm>
+            <a:off x="16047720" y="2596896"/>
+            <a:ext cx="1417320" cy="329184"/>
+          </a:xfrm>
+          <a:prstGeom prst="roundRect">
+            <a:avLst>
+              <a:gd name="adj" fmla="val 12000"/>
+            </a:avLst>
+          </a:prstGeom>
+          <a:solidFill>
+            <a:srgbClr val="E6C8F5"/>
+          </a:solidFill>
+          <a:ln w="15875">
+            <a:solidFill>
+              <a:srgbClr val="7030A0"/>
+            </a:solidFill>
+          </a:ln>
+          <a:effectLst/>
+        </p:spPr>
+        <p:style>
+          <a:lnRef idx="1">
+            <a:schemeClr val="accent1"/>
+          </a:lnRef>
+          <a:fillRef idx="3">
+            <a:schemeClr val="accent1"/>
+          </a:fillRef>
+          <a:effectRef idx="2">
+            <a:schemeClr val="accent1"/>
+          </a:effectRef>
+          <a:fontRef idx="minor">
+            <a:schemeClr val="lt1"/>
+          </a:fontRef>
+        </p:style>
+        <p:txBody>
+          <a:bodyPr rtlCol="0" anchor="ctr" wrap="square" lIns="45720" rIns="45720" tIns="18288" bIns="18288"/>
           <a:lstStyle/>
           <a:p>
-            <a:pPr marL="292608" indent="-256032">
-              <a:spcAft>
-                <a:spcPts val="700"/>
-              </a:spcAft>
-              <a:buFont typeface="Arial"/>
-              <a:buChar char="•"/>
-            </a:pPr>
-            <a:r>
-              <a:rPr b="1" sz="1600">
+            <a:pPr algn="ctr"/>
+            <a:r>
+              <a:rPr sz="950" b="1">
                 <a:solidFill>
                   <a:srgbClr val="1A1A1A"/>
                 </a:solidFill>
                 <a:latin typeface="Calibri"/>
               </a:rPr>
-              <a:t>POSITIVE / NEGATIVE: </a:t>
-            </a:r>
-            <a:r>
-              <a:rPr sz="1600">
+              <a:t>No → NOT SURE</a:t>
+            </a:r>
+          </a:p>
+        </p:txBody>
+      </p:sp>
+      <p:cxnSp>
+        <p:nvCxnSpPr>
+          <p:cNvPr id="53" name="Connector 52"/>
+          <p:cNvCxnSpPr/>
+          <p:nvPr/>
+        </p:nvCxnSpPr>
+        <p:spPr>
+          <a:xfrm>
+            <a:off x="13917168" y="2962656"/>
+            <a:ext cx="0" cy="146304"/>
+          </a:xfrm>
+          <a:prstGeom prst="line">
+            <a:avLst/>
+          </a:prstGeom>
+          <a:ln w="22225">
+            <a:solidFill>
+              <a:srgbClr val="2F5597"/>
+            </a:solidFill>
+            <a:tailEnd type="triangle" w="med" h="med"/>
+          </a:ln>
+        </p:spPr>
+        <p:style>
+          <a:lnRef idx="2">
+            <a:schemeClr val="accent1"/>
+          </a:lnRef>
+          <a:fillRef idx="0">
+            <a:schemeClr val="accent1"/>
+          </a:fillRef>
+          <a:effectRef idx="1">
+            <a:schemeClr val="accent1"/>
+          </a:effectRef>
+          <a:fontRef idx="minor">
+            <a:schemeClr val="tx1"/>
+          </a:fontRef>
+        </p:style>
+      </p:cxnSp>
+      <p:sp>
+        <p:nvSpPr>
+          <p:cNvPr id="54" name="Rounded Rectangle 53"/>
+          <p:cNvSpPr/>
+          <p:nvPr/>
+        </p:nvSpPr>
+        <p:spPr>
+          <a:xfrm>
+            <a:off x="12024360" y="3108960"/>
+            <a:ext cx="3794760" cy="402336"/>
+          </a:xfrm>
+          <a:prstGeom prst="roundRect">
+            <a:avLst>
+              <a:gd name="adj" fmla="val 12000"/>
+            </a:avLst>
+          </a:prstGeom>
+          <a:solidFill>
+            <a:srgbClr val="FFFFFF"/>
+          </a:solidFill>
+          <a:ln w="15875">
+            <a:solidFill>
+              <a:srgbClr val="2F5597"/>
+            </a:solidFill>
+          </a:ln>
+          <a:effectLst/>
+        </p:spPr>
+        <p:style>
+          <a:lnRef idx="1">
+            <a:schemeClr val="accent1"/>
+          </a:lnRef>
+          <a:fillRef idx="3">
+            <a:schemeClr val="accent1"/>
+          </a:fillRef>
+          <a:effectRef idx="2">
+            <a:schemeClr val="accent1"/>
+          </a:effectRef>
+          <a:fontRef idx="minor">
+            <a:schemeClr val="lt1"/>
+          </a:fontRef>
+        </p:style>
+        <p:txBody>
+          <a:bodyPr rtlCol="0" anchor="ctr" wrap="square" lIns="45720" rIns="45720" tIns="18288" bIns="18288"/>
+          <a:lstStyle/>
+          <a:p>
+            <a:pPr algn="ctr"/>
+            <a:r>
+              <a:rPr sz="1150" b="1">
                 <a:solidFill>
                   <a:srgbClr val="1A1A1A"/>
                 </a:solidFill>
                 <a:latin typeface="Calibri"/>
               </a:rPr>
-              <a:t>colour clearly matches one kit result</a:t>
-            </a:r>
-          </a:p>
-          <a:p>
-            <a:pPr marL="292608" indent="-256032">
-              <a:spcAft>
-                <a:spcPts val="700"/>
-              </a:spcAft>
-              <a:buFont typeface="Arial"/>
-              <a:buChar char="•"/>
-            </a:pPr>
-            <a:r>
-              <a:rPr b="1" sz="1600">
+              <a:t>2. Photo sharp, no shine?</a:t>
+            </a:r>
+          </a:p>
+        </p:txBody>
+      </p:sp>
+      <p:cxnSp>
+        <p:nvCxnSpPr>
+          <p:cNvPr id="55" name="Connector 54"/>
+          <p:cNvCxnSpPr/>
+          <p:nvPr/>
+        </p:nvCxnSpPr>
+        <p:spPr>
+          <a:xfrm>
+            <a:off x="15819120" y="3310128"/>
+            <a:ext cx="228600" cy="0"/>
+          </a:xfrm>
+          <a:prstGeom prst="line">
+            <a:avLst/>
+          </a:prstGeom>
+          <a:ln w="22225">
+            <a:solidFill>
+              <a:srgbClr val="7030A0"/>
+            </a:solidFill>
+            <a:tailEnd type="triangle" w="med" h="med"/>
+          </a:ln>
+        </p:spPr>
+        <p:style>
+          <a:lnRef idx="2">
+            <a:schemeClr val="accent1"/>
+          </a:lnRef>
+          <a:fillRef idx="0">
+            <a:schemeClr val="accent1"/>
+          </a:fillRef>
+          <a:effectRef idx="1">
+            <a:schemeClr val="accent1"/>
+          </a:effectRef>
+          <a:fontRef idx="minor">
+            <a:schemeClr val="tx1"/>
+          </a:fontRef>
+        </p:style>
+      </p:cxnSp>
+      <p:sp>
+        <p:nvSpPr>
+          <p:cNvPr id="56" name="Rounded Rectangle 55"/>
+          <p:cNvSpPr/>
+          <p:nvPr/>
+        </p:nvSpPr>
+        <p:spPr>
+          <a:xfrm>
+            <a:off x="16047720" y="3145536"/>
+            <a:ext cx="1417320" cy="329184"/>
+          </a:xfrm>
+          <a:prstGeom prst="roundRect">
+            <a:avLst>
+              <a:gd name="adj" fmla="val 12000"/>
+            </a:avLst>
+          </a:prstGeom>
+          <a:solidFill>
+            <a:srgbClr val="E6C8F5"/>
+          </a:solidFill>
+          <a:ln w="15875">
+            <a:solidFill>
+              <a:srgbClr val="7030A0"/>
+            </a:solidFill>
+          </a:ln>
+          <a:effectLst/>
+        </p:spPr>
+        <p:style>
+          <a:lnRef idx="1">
+            <a:schemeClr val="accent1"/>
+          </a:lnRef>
+          <a:fillRef idx="3">
+            <a:schemeClr val="accent1"/>
+          </a:fillRef>
+          <a:effectRef idx="2">
+            <a:schemeClr val="accent1"/>
+          </a:effectRef>
+          <a:fontRef idx="minor">
+            <a:schemeClr val="lt1"/>
+          </a:fontRef>
+        </p:style>
+        <p:txBody>
+          <a:bodyPr rtlCol="0" anchor="ctr" wrap="square" lIns="45720" rIns="45720" tIns="18288" bIns="18288"/>
+          <a:lstStyle/>
+          <a:p>
+            <a:pPr algn="ctr"/>
+            <a:r>
+              <a:rPr sz="950" b="1">
                 <a:solidFill>
                   <a:srgbClr val="1A1A1A"/>
                 </a:solidFill>
                 <a:latin typeface="Calibri"/>
               </a:rPr>
-              <a:t>NOT SURE: </a:t>
-            </a:r>
-            <a:r>
-              <a:rPr sz="1600">
+              <a:t>No → NOT SURE</a:t>
+            </a:r>
+          </a:p>
+        </p:txBody>
+      </p:sp>
+      <p:cxnSp>
+        <p:nvCxnSpPr>
+          <p:cNvPr id="57" name="Connector 56"/>
+          <p:cNvCxnSpPr/>
+          <p:nvPr/>
+        </p:nvCxnSpPr>
+        <p:spPr>
+          <a:xfrm>
+            <a:off x="13917168" y="3511296"/>
+            <a:ext cx="0" cy="146304"/>
+          </a:xfrm>
+          <a:prstGeom prst="line">
+            <a:avLst/>
+          </a:prstGeom>
+          <a:ln w="22225">
+            <a:solidFill>
+              <a:srgbClr val="2F5597"/>
+            </a:solidFill>
+            <a:tailEnd type="triangle" w="med" h="med"/>
+          </a:ln>
+        </p:spPr>
+        <p:style>
+          <a:lnRef idx="2">
+            <a:schemeClr val="accent1"/>
+          </a:lnRef>
+          <a:fillRef idx="0">
+            <a:schemeClr val="accent1"/>
+          </a:fillRef>
+          <a:effectRef idx="1">
+            <a:schemeClr val="accent1"/>
+          </a:effectRef>
+          <a:fontRef idx="minor">
+            <a:schemeClr val="tx1"/>
+          </a:fontRef>
+        </p:style>
+      </p:cxnSp>
+      <p:sp>
+        <p:nvSpPr>
+          <p:cNvPr id="58" name="Rounded Rectangle 57"/>
+          <p:cNvSpPr/>
+          <p:nvPr/>
+        </p:nvSpPr>
+        <p:spPr>
+          <a:xfrm>
+            <a:off x="12024360" y="3657600"/>
+            <a:ext cx="3794760" cy="402336"/>
+          </a:xfrm>
+          <a:prstGeom prst="roundRect">
+            <a:avLst>
+              <a:gd name="adj" fmla="val 12000"/>
+            </a:avLst>
+          </a:prstGeom>
+          <a:solidFill>
+            <a:srgbClr val="FFFFFF"/>
+          </a:solidFill>
+          <a:ln w="15875">
+            <a:solidFill>
+              <a:srgbClr val="2F5597"/>
+            </a:solidFill>
+          </a:ln>
+          <a:effectLst/>
+        </p:spPr>
+        <p:style>
+          <a:lnRef idx="1">
+            <a:schemeClr val="accent1"/>
+          </a:lnRef>
+          <a:fillRef idx="3">
+            <a:schemeClr val="accent1"/>
+          </a:fillRef>
+          <a:effectRef idx="2">
+            <a:schemeClr val="accent1"/>
+          </a:effectRef>
+          <a:fontRef idx="minor">
+            <a:schemeClr val="lt1"/>
+          </a:fontRef>
+        </p:style>
+        <p:txBody>
+          <a:bodyPr rtlCol="0" anchor="ctr" wrap="square" lIns="45720" rIns="45720" tIns="18288" bIns="18288"/>
+          <a:lstStyle/>
+          <a:p>
+            <a:pPr algn="ctr"/>
+            <a:r>
+              <a:rPr sz="1150" b="1">
                 <a:solidFill>
                   <a:srgbClr val="1A1A1A"/>
                 </a:solidFill>
                 <a:latin typeface="Calibri"/>
               </a:rPr>
-              <a:t>colour card not found in the photo</a:t>
-            </a:r>
-          </a:p>
-          <a:p>
-            <a:pPr marL="292608" indent="-256032">
-              <a:spcAft>
-                <a:spcPts val="700"/>
-              </a:spcAft>
-              <a:buFont typeface="Arial"/>
-              <a:buChar char="•"/>
-            </a:pPr>
-            <a:r>
-              <a:rPr b="1" sz="1600">
+              <a:t>3. Closest kit colour: difference ≤ 14?</a:t>
+            </a:r>
+          </a:p>
+        </p:txBody>
+      </p:sp>
+      <p:cxnSp>
+        <p:nvCxnSpPr>
+          <p:cNvPr id="59" name="Connector 58"/>
+          <p:cNvCxnSpPr/>
+          <p:nvPr/>
+        </p:nvCxnSpPr>
+        <p:spPr>
+          <a:xfrm>
+            <a:off x="15819120" y="3858768"/>
+            <a:ext cx="228600" cy="0"/>
+          </a:xfrm>
+          <a:prstGeom prst="line">
+            <a:avLst/>
+          </a:prstGeom>
+          <a:ln w="22225">
+            <a:solidFill>
+              <a:srgbClr val="7030A0"/>
+            </a:solidFill>
+            <a:tailEnd type="triangle" w="med" h="med"/>
+          </a:ln>
+        </p:spPr>
+        <p:style>
+          <a:lnRef idx="2">
+            <a:schemeClr val="accent1"/>
+          </a:lnRef>
+          <a:fillRef idx="0">
+            <a:schemeClr val="accent1"/>
+          </a:fillRef>
+          <a:effectRef idx="1">
+            <a:schemeClr val="accent1"/>
+          </a:effectRef>
+          <a:fontRef idx="minor">
+            <a:schemeClr val="tx1"/>
+          </a:fontRef>
+        </p:style>
+      </p:cxnSp>
+      <p:sp>
+        <p:nvSpPr>
+          <p:cNvPr id="60" name="Rounded Rectangle 59"/>
+          <p:cNvSpPr/>
+          <p:nvPr/>
+        </p:nvSpPr>
+        <p:spPr>
+          <a:xfrm>
+            <a:off x="16047720" y="3694176"/>
+            <a:ext cx="1417320" cy="329184"/>
+          </a:xfrm>
+          <a:prstGeom prst="roundRect">
+            <a:avLst>
+              <a:gd name="adj" fmla="val 12000"/>
+            </a:avLst>
+          </a:prstGeom>
+          <a:solidFill>
+            <a:srgbClr val="E6C8F5"/>
+          </a:solidFill>
+          <a:ln w="15875">
+            <a:solidFill>
+              <a:srgbClr val="7030A0"/>
+            </a:solidFill>
+          </a:ln>
+          <a:effectLst/>
+        </p:spPr>
+        <p:style>
+          <a:lnRef idx="1">
+            <a:schemeClr val="accent1"/>
+          </a:lnRef>
+          <a:fillRef idx="3">
+            <a:schemeClr val="accent1"/>
+          </a:fillRef>
+          <a:effectRef idx="2">
+            <a:schemeClr val="accent1"/>
+          </a:effectRef>
+          <a:fontRef idx="minor">
+            <a:schemeClr val="lt1"/>
+          </a:fontRef>
+        </p:style>
+        <p:txBody>
+          <a:bodyPr rtlCol="0" anchor="ctr" wrap="square" lIns="45720" rIns="45720" tIns="18288" bIns="18288"/>
+          <a:lstStyle/>
+          <a:p>
+            <a:pPr algn="ctr"/>
+            <a:r>
+              <a:rPr sz="950" b="1">
                 <a:solidFill>
                   <a:srgbClr val="1A1A1A"/>
                 </a:solidFill>
                 <a:latin typeface="Calibri"/>
               </a:rPr>
-              <a:t>NOT SURE: </a:t>
-            </a:r>
-            <a:r>
-              <a:rPr sz="1600">
+              <a:t>No → NOT SURE</a:t>
+            </a:r>
+          </a:p>
+        </p:txBody>
+      </p:sp>
+      <p:cxnSp>
+        <p:nvCxnSpPr>
+          <p:cNvPr id="61" name="Connector 60"/>
+          <p:cNvCxnSpPr/>
+          <p:nvPr/>
+        </p:nvCxnSpPr>
+        <p:spPr>
+          <a:xfrm>
+            <a:off x="13917168" y="4059936"/>
+            <a:ext cx="0" cy="146304"/>
+          </a:xfrm>
+          <a:prstGeom prst="line">
+            <a:avLst/>
+          </a:prstGeom>
+          <a:ln w="22225">
+            <a:solidFill>
+              <a:srgbClr val="2F5597"/>
+            </a:solidFill>
+            <a:tailEnd type="triangle" w="med" h="med"/>
+          </a:ln>
+        </p:spPr>
+        <p:style>
+          <a:lnRef idx="2">
+            <a:schemeClr val="accent1"/>
+          </a:lnRef>
+          <a:fillRef idx="0">
+            <a:schemeClr val="accent1"/>
+          </a:fillRef>
+          <a:effectRef idx="1">
+            <a:schemeClr val="accent1"/>
+          </a:effectRef>
+          <a:fontRef idx="minor">
+            <a:schemeClr val="tx1"/>
+          </a:fontRef>
+        </p:style>
+      </p:cxnSp>
+      <p:sp>
+        <p:nvSpPr>
+          <p:cNvPr id="62" name="Rounded Rectangle 61"/>
+          <p:cNvSpPr/>
+          <p:nvPr/>
+        </p:nvSpPr>
+        <p:spPr>
+          <a:xfrm>
+            <a:off x="12024360" y="4206240"/>
+            <a:ext cx="3794760" cy="402336"/>
+          </a:xfrm>
+          <a:prstGeom prst="roundRect">
+            <a:avLst>
+              <a:gd name="adj" fmla="val 12000"/>
+            </a:avLst>
+          </a:prstGeom>
+          <a:solidFill>
+            <a:srgbClr val="FFFFFF"/>
+          </a:solidFill>
+          <a:ln w="15875">
+            <a:solidFill>
+              <a:srgbClr val="2F5597"/>
+            </a:solidFill>
+          </a:ln>
+          <a:effectLst/>
+        </p:spPr>
+        <p:style>
+          <a:lnRef idx="1">
+            <a:schemeClr val="accent1"/>
+          </a:lnRef>
+          <a:fillRef idx="3">
+            <a:schemeClr val="accent1"/>
+          </a:fillRef>
+          <a:effectRef idx="2">
+            <a:schemeClr val="accent1"/>
+          </a:effectRef>
+          <a:fontRef idx="minor">
+            <a:schemeClr val="lt1"/>
+          </a:fontRef>
+        </p:style>
+        <p:txBody>
+          <a:bodyPr rtlCol="0" anchor="ctr" wrap="square" lIns="45720" rIns="45720" tIns="18288" bIns="18288"/>
+          <a:lstStyle/>
+          <a:p>
+            <a:pPr algn="ctr"/>
+            <a:r>
+              <a:rPr sz="1150" b="1">
                 <a:solidFill>
                   <a:srgbClr val="1A1A1A"/>
                 </a:solidFill>
                 <a:latin typeface="Calibri"/>
               </a:rPr>
-              <a:t>photo is blurry or shiny</a:t>
-            </a:r>
-          </a:p>
-          <a:p>
-            <a:pPr marL="292608" indent="-256032">
-              <a:spcAft>
-                <a:spcPts val="700"/>
-              </a:spcAft>
-              <a:buFont typeface="Arial"/>
-              <a:buChar char="•"/>
-            </a:pPr>
-            <a:r>
-              <a:rPr b="1" sz="1600">
+              <a:t>4. Clear winner: 2nd best ≥ 4 further?</a:t>
+            </a:r>
+          </a:p>
+        </p:txBody>
+      </p:sp>
+      <p:cxnSp>
+        <p:nvCxnSpPr>
+          <p:cNvPr id="63" name="Connector 62"/>
+          <p:cNvCxnSpPr/>
+          <p:nvPr/>
+        </p:nvCxnSpPr>
+        <p:spPr>
+          <a:xfrm>
+            <a:off x="15819120" y="4407407"/>
+            <a:ext cx="228600" cy="0"/>
+          </a:xfrm>
+          <a:prstGeom prst="line">
+            <a:avLst/>
+          </a:prstGeom>
+          <a:ln w="22225">
+            <a:solidFill>
+              <a:srgbClr val="7030A0"/>
+            </a:solidFill>
+            <a:tailEnd type="triangle" w="med" h="med"/>
+          </a:ln>
+        </p:spPr>
+        <p:style>
+          <a:lnRef idx="2">
+            <a:schemeClr val="accent1"/>
+          </a:lnRef>
+          <a:fillRef idx="0">
+            <a:schemeClr val="accent1"/>
+          </a:fillRef>
+          <a:effectRef idx="1">
+            <a:schemeClr val="accent1"/>
+          </a:effectRef>
+          <a:fontRef idx="minor">
+            <a:schemeClr val="tx1"/>
+          </a:fontRef>
+        </p:style>
+      </p:cxnSp>
+      <p:sp>
+        <p:nvSpPr>
+          <p:cNvPr id="64" name="Rounded Rectangle 63"/>
+          <p:cNvSpPr/>
+          <p:nvPr/>
+        </p:nvSpPr>
+        <p:spPr>
+          <a:xfrm>
+            <a:off x="16047720" y="4242816"/>
+            <a:ext cx="1417320" cy="329184"/>
+          </a:xfrm>
+          <a:prstGeom prst="roundRect">
+            <a:avLst>
+              <a:gd name="adj" fmla="val 12000"/>
+            </a:avLst>
+          </a:prstGeom>
+          <a:solidFill>
+            <a:srgbClr val="E6C8F5"/>
+          </a:solidFill>
+          <a:ln w="15875">
+            <a:solidFill>
+              <a:srgbClr val="7030A0"/>
+            </a:solidFill>
+          </a:ln>
+          <a:effectLst/>
+        </p:spPr>
+        <p:style>
+          <a:lnRef idx="1">
+            <a:schemeClr val="accent1"/>
+          </a:lnRef>
+          <a:fillRef idx="3">
+            <a:schemeClr val="accent1"/>
+          </a:fillRef>
+          <a:effectRef idx="2">
+            <a:schemeClr val="accent1"/>
+          </a:effectRef>
+          <a:fontRef idx="minor">
+            <a:schemeClr val="lt1"/>
+          </a:fontRef>
+        </p:style>
+        <p:txBody>
+          <a:bodyPr rtlCol="0" anchor="ctr" wrap="square" lIns="45720" rIns="45720" tIns="18288" bIns="18288"/>
+          <a:lstStyle/>
+          <a:p>
+            <a:pPr algn="ctr"/>
+            <a:r>
+              <a:rPr sz="950" b="1">
                 <a:solidFill>
                   <a:srgbClr val="1A1A1A"/>
                 </a:solidFill>
                 <a:latin typeface="Calibri"/>
               </a:rPr>
-              <a:t>NOT SURE: </a:t>
-            </a:r>
-            <a:r>
-              <a:rPr sz="1600">
+              <a:t>No → NOT SURE</a:t>
+            </a:r>
+          </a:p>
+        </p:txBody>
+      </p:sp>
+      <p:cxnSp>
+        <p:nvCxnSpPr>
+          <p:cNvPr id="65" name="Connector 64"/>
+          <p:cNvCxnSpPr/>
+          <p:nvPr/>
+        </p:nvCxnSpPr>
+        <p:spPr>
+          <a:xfrm>
+            <a:off x="13917168" y="4608576"/>
+            <a:ext cx="0" cy="164591"/>
+          </a:xfrm>
+          <a:prstGeom prst="line">
+            <a:avLst/>
+          </a:prstGeom>
+          <a:ln w="22225">
+            <a:solidFill>
+              <a:srgbClr val="2F5597"/>
+            </a:solidFill>
+            <a:tailEnd type="triangle" w="med" h="med"/>
+          </a:ln>
+        </p:spPr>
+        <p:style>
+          <a:lnRef idx="2">
+            <a:schemeClr val="accent1"/>
+          </a:lnRef>
+          <a:fillRef idx="0">
+            <a:schemeClr val="accent1"/>
+          </a:fillRef>
+          <a:effectRef idx="1">
+            <a:schemeClr val="accent1"/>
+          </a:effectRef>
+          <a:fontRef idx="minor">
+            <a:schemeClr val="tx1"/>
+          </a:fontRef>
+        </p:style>
+      </p:cxnSp>
+      <p:sp>
+        <p:nvSpPr>
+          <p:cNvPr id="66" name="Rounded Rectangle 65"/>
+          <p:cNvSpPr/>
+          <p:nvPr/>
+        </p:nvSpPr>
+        <p:spPr>
+          <a:xfrm>
+            <a:off x="12024360" y="4773167"/>
+            <a:ext cx="5440680" cy="384048"/>
+          </a:xfrm>
+          <a:prstGeom prst="roundRect">
+            <a:avLst>
+              <a:gd name="adj" fmla="val 12000"/>
+            </a:avLst>
+          </a:prstGeom>
+          <a:solidFill>
+            <a:srgbClr val="E2F0D9"/>
+          </a:solidFill>
+          <a:ln w="15875">
+            <a:solidFill>
+              <a:srgbClr val="548235"/>
+            </a:solidFill>
+          </a:ln>
+          <a:effectLst/>
+        </p:spPr>
+        <p:style>
+          <a:lnRef idx="1">
+            <a:schemeClr val="accent1"/>
+          </a:lnRef>
+          <a:fillRef idx="3">
+            <a:schemeClr val="accent1"/>
+          </a:fillRef>
+          <a:effectRef idx="2">
+            <a:schemeClr val="accent1"/>
+          </a:effectRef>
+          <a:fontRef idx="minor">
+            <a:schemeClr val="lt1"/>
+          </a:fontRef>
+        </p:style>
+        <p:txBody>
+          <a:bodyPr rtlCol="0" anchor="ctr" wrap="square" lIns="45720" rIns="45720" tIns="18288" bIns="18288"/>
+          <a:lstStyle/>
+          <a:p>
+            <a:pPr algn="ctr"/>
+            <a:r>
+              <a:rPr sz="1100" b="1">
                 <a:solidFill>
                   <a:srgbClr val="1A1A1A"/>
                 </a:solidFill>
                 <a:latin typeface="Calibri"/>
               </a:rPr>
-              <a:t>colour does not match any result</a:t>
-            </a:r>
-          </a:p>
-          <a:p>
-            <a:pPr marL="292608" indent="-256032">
-              <a:spcAft>
-                <a:spcPts val="700"/>
-              </a:spcAft>
-              <a:buFont typeface="Arial"/>
-              <a:buChar char="•"/>
-            </a:pPr>
-            <a:r>
-              <a:rPr b="1" sz="1600">
-                <a:solidFill>
-                  <a:srgbClr val="1A1A1A"/>
-                </a:solidFill>
-                <a:latin typeface="Calibri"/>
-              </a:rPr>
-              <a:t>NOT SURE: </a:t>
-            </a:r>
-            <a:r>
-              <a:rPr sz="1600">
-                <a:solidFill>
-                  <a:srgbClr val="1A1A1A"/>
-                </a:solidFill>
-                <a:latin typeface="Calibri"/>
-              </a:rPr>
-              <a:t>colour is in between two results</a:t>
-            </a:r>
-          </a:p>
-          <a:p>
-            <a:pPr marL="292608" indent="-256032">
-              <a:spcAft>
-                <a:spcPts val="700"/>
-              </a:spcAft>
-              <a:buFont typeface="Arial"/>
-              <a:buChar char="•"/>
-            </a:pPr>
-            <a:r>
-              <a:rPr b="1" sz="1600">
-                <a:solidFill>
-                  <a:srgbClr val="1A1A1A"/>
-                </a:solidFill>
-                <a:latin typeface="Calibri"/>
-              </a:rPr>
-              <a:t>"% sure": </a:t>
-            </a:r>
-            <a:r>
-              <a:rPr sz="1600">
-                <a:solidFill>
-                  <a:srgbClr val="1A1A1A"/>
-                </a:solidFill>
-                <a:latin typeface="Calibri"/>
-              </a:rPr>
-              <a:t>how clearly it matches the best result</a:t>
-            </a:r>
-          </a:p>
-        </p:txBody>
-      </p:sp>
-      <p:sp>
-        <p:nvSpPr>
-          <p:cNvPr id="51" name="TextBox 50"/>
+              <a:t>Yes → POSITIVE / NEGATIVE + "% sure"   (limits are set per kit)</a:t>
+            </a:r>
+          </a:p>
+        </p:txBody>
+      </p:sp>
+      <p:sp>
+        <p:nvSpPr>
+          <p:cNvPr id="67" name="TextBox 66"/>
           <p:cNvSpPr txBox="1"/>
           <p:nvPr/>
         </p:nvSpPr>
@@ -9459,7 +10110,7 @@
       </p:sp>
       <p:sp>
         <p:nvSpPr>
-          <p:cNvPr id="52" name="TextBox 51"/>
+          <p:cNvPr id="68" name="TextBox 67"/>
           <p:cNvSpPr txBox="1"/>
           <p:nvPr/>
         </p:nvSpPr>
@@ -9494,7 +10145,7 @@
       </p:sp>
       <p:sp>
         <p:nvSpPr>
-          <p:cNvPr id="53" name="TextBox 52"/>
+          <p:cNvPr id="69" name="TextBox 68"/>
           <p:cNvSpPr txBox="1"/>
           <p:nvPr/>
         </p:nvSpPr>
@@ -9598,7 +10249,7 @@
       </p:sp>
       <p:sp>
         <p:nvSpPr>
-          <p:cNvPr id="54" name="TextBox 53"/>
+          <p:cNvPr id="70" name="TextBox 69"/>
           <p:cNvSpPr txBox="1"/>
           <p:nvPr/>
         </p:nvSpPr>
@@ -9633,7 +10284,7 @@
       </p:sp>
       <p:sp>
         <p:nvSpPr>
-          <p:cNvPr id="55" name="TextBox 54"/>
+          <p:cNvPr id="71" name="TextBox 70"/>
           <p:cNvSpPr txBox="1"/>
           <p:nvPr/>
         </p:nvSpPr>
@@ -9668,7 +10319,7 @@
       </p:sp>
       <p:sp>
         <p:nvSpPr>
-          <p:cNvPr id="56" name="Rounded Rectangle 55"/>
+          <p:cNvPr id="72" name="Rounded Rectangle 71"/>
           <p:cNvSpPr/>
           <p:nvPr/>
         </p:nvSpPr>
@@ -9737,7 +10388,7 @@
       </p:sp>
       <p:cxnSp>
         <p:nvCxnSpPr>
-          <p:cNvPr id="57" name="Connector 56"/>
+          <p:cNvPr id="73" name="Connector 72"/>
           <p:cNvCxnSpPr/>
           <p:nvPr/>
         </p:nvCxnSpPr>
@@ -9773,7 +10424,7 @@
       </p:cxnSp>
       <p:sp>
         <p:nvSpPr>
-          <p:cNvPr id="58" name="Rounded Rectangle 57"/>
+          <p:cNvPr id="74" name="Rounded Rectangle 73"/>
           <p:cNvSpPr/>
           <p:nvPr/>
         </p:nvSpPr>
@@ -9842,7 +10493,7 @@
       </p:sp>
       <p:cxnSp>
         <p:nvCxnSpPr>
-          <p:cNvPr id="59" name="Connector 58"/>
+          <p:cNvPr id="75" name="Connector 74"/>
           <p:cNvCxnSpPr/>
           <p:nvPr/>
         </p:nvCxnSpPr>
@@ -9878,7 +10529,7 @@
       </p:cxnSp>
       <p:sp>
         <p:nvSpPr>
-          <p:cNvPr id="60" name="Rounded Rectangle 59"/>
+          <p:cNvPr id="76" name="Rounded Rectangle 75"/>
           <p:cNvSpPr/>
           <p:nvPr/>
         </p:nvSpPr>
@@ -9947,7 +10598,7 @@
       </p:sp>
       <p:cxnSp>
         <p:nvCxnSpPr>
-          <p:cNvPr id="61" name="Connector 60"/>
+          <p:cNvPr id="77" name="Connector 76"/>
           <p:cNvCxnSpPr/>
           <p:nvPr/>
         </p:nvCxnSpPr>
@@ -9983,7 +10634,7 @@
       </p:cxnSp>
       <p:sp>
         <p:nvSpPr>
-          <p:cNvPr id="62" name="Rounded Rectangle 61"/>
+          <p:cNvPr id="78" name="Rounded Rectangle 77"/>
           <p:cNvSpPr/>
           <p:nvPr/>
         </p:nvSpPr>
@@ -10052,7 +10703,7 @@
       </p:sp>
       <p:sp>
         <p:nvSpPr>
-          <p:cNvPr id="63" name="Rounded Rectangle 62"/>
+          <p:cNvPr id="79" name="Rounded Rectangle 78"/>
           <p:cNvSpPr/>
           <p:nvPr/>
         </p:nvSpPr>
@@ -10109,7 +10760,7 @@
       </p:sp>
       <p:sp>
         <p:nvSpPr>
-          <p:cNvPr id="64" name="TextBox 63"/>
+          <p:cNvPr id="80" name="TextBox 79"/>
           <p:cNvSpPr txBox="1"/>
           <p:nvPr/>
         </p:nvSpPr>
@@ -10144,7 +10795,7 @@
       </p:sp>
       <p:sp>
         <p:nvSpPr>
-          <p:cNvPr id="65" name="Rounded Rectangle 64"/>
+          <p:cNvPr id="81" name="Rounded Rectangle 80"/>
           <p:cNvSpPr/>
           <p:nvPr/>
         </p:nvSpPr>
@@ -10201,7 +10852,7 @@
       </p:sp>
       <p:sp>
         <p:nvSpPr>
-          <p:cNvPr id="66" name="Rounded Rectangle 65"/>
+          <p:cNvPr id="82" name="Rounded Rectangle 81"/>
           <p:cNvSpPr/>
           <p:nvPr/>
         </p:nvSpPr>
@@ -10258,7 +10909,7 @@
       </p:sp>
       <p:sp>
         <p:nvSpPr>
-          <p:cNvPr id="67" name="Rounded Rectangle 66"/>
+          <p:cNvPr id="83" name="Rounded Rectangle 82"/>
           <p:cNvSpPr/>
           <p:nvPr/>
         </p:nvSpPr>
@@ -10327,7 +10978,7 @@
       </p:sp>
       <p:sp>
         <p:nvSpPr>
-          <p:cNvPr id="68" name="Rounded Rectangle 67"/>
+          <p:cNvPr id="84" name="Rounded Rectangle 83"/>
           <p:cNvSpPr/>
           <p:nvPr/>
         </p:nvSpPr>
@@ -10396,7 +11047,7 @@
       </p:sp>
       <p:sp>
         <p:nvSpPr>
-          <p:cNvPr id="69" name="Rounded Rectangle 68"/>
+          <p:cNvPr id="85" name="Rounded Rectangle 84"/>
           <p:cNvSpPr/>
           <p:nvPr/>
         </p:nvSpPr>
@@ -10453,7 +11104,7 @@
       </p:sp>
       <p:sp>
         <p:nvSpPr>
-          <p:cNvPr id="70" name="Rounded Rectangle 69"/>
+          <p:cNvPr id="86" name="Rounded Rectangle 85"/>
           <p:cNvSpPr/>
           <p:nvPr/>
         </p:nvSpPr>
@@ -10510,7 +11161,7 @@
       </p:sp>
       <p:cxnSp>
         <p:nvCxnSpPr>
-          <p:cNvPr id="71" name="Connector 70"/>
+          <p:cNvPr id="87" name="Connector 86"/>
           <p:cNvCxnSpPr/>
           <p:nvPr/>
         </p:nvCxnSpPr>
@@ -10546,7 +11197,7 @@
       </p:cxnSp>
       <p:cxnSp>
         <p:nvCxnSpPr>
-          <p:cNvPr id="72" name="Connector 71"/>
+          <p:cNvPr id="88" name="Connector 87"/>
           <p:cNvCxnSpPr/>
           <p:nvPr/>
         </p:nvCxnSpPr>
@@ -10582,7 +11233,7 @@
       </p:cxnSp>
       <p:cxnSp>
         <p:nvCxnSpPr>
-          <p:cNvPr id="73" name="Connector 72"/>
+          <p:cNvPr id="89" name="Connector 88"/>
           <p:cNvCxnSpPr/>
           <p:nvPr/>
         </p:nvCxnSpPr>
@@ -10618,7 +11269,7 @@
       </p:cxnSp>
       <p:cxnSp>
         <p:nvCxnSpPr>
-          <p:cNvPr id="74" name="Connector 73"/>
+          <p:cNvPr id="90" name="Connector 89"/>
           <p:cNvCxnSpPr/>
           <p:nvPr/>
         </p:nvCxnSpPr>
@@ -10654,7 +11305,7 @@
       </p:cxnSp>
       <p:cxnSp>
         <p:nvCxnSpPr>
-          <p:cNvPr id="75" name="Connector 74"/>
+          <p:cNvPr id="91" name="Connector 90"/>
           <p:cNvCxnSpPr/>
           <p:nvPr/>
         </p:nvCxnSpPr>
@@ -10690,7 +11341,7 @@
       </p:cxnSp>
       <p:sp>
         <p:nvSpPr>
-          <p:cNvPr id="76" name="TextBox 75"/>
+          <p:cNvPr id="92" name="TextBox 91"/>
           <p:cNvSpPr txBox="1"/>
           <p:nvPr/>
         </p:nvSpPr>
@@ -11755,7 +12406,7 @@
                           <a:cs typeface="Calibri (MS)"/>
                           <a:sym typeface="Calibri (MS)"/>
                         </a:rPr>
-                        <a:t>Different kits and phones</a:t>
+                        <a:t>Kit from another maker or batch</a:t>
                       </a:r>
                       <a:endParaRPr lang="en-US" sz="1100"/>
                     </a:p>
@@ -11820,7 +12471,7 @@
                           <a:cs typeface="Calibri (MS)"/>
                           <a:sym typeface="Calibri (MS)"/>
                         </a:rPr>
-                        <a:t>Kit settings + colours fixed every photo</a:t>
+                        <a:t>Own profile per maker/batch; else NOT SURE</a:t>
                       </a:r>
                       <a:endParaRPr lang="en-US" sz="1100"/>
                     </a:p>
@@ -12397,13 +13048,13 @@
           <a:p>
             <a:pPr marL="292608" indent="-256032">
               <a:spcAft>
-                <a:spcPts val="400"/>
+                <a:spcPts val="300"/>
               </a:spcAft>
               <a:buFont typeface="Arial"/>
               <a:buChar char="•"/>
             </a:pPr>
             <a:r>
-              <a:rPr b="1" sz="1800">
+              <a:rPr b="1" sz="1700">
                 <a:solidFill>
                   <a:srgbClr val="1A1A1A"/>
                 </a:solidFill>
@@ -12412,7 +13063,7 @@
               <a:t>Technical - </a:t>
             </a:r>
             <a:r>
-              <a:rPr sz="1800">
+              <a:rPr sz="1700">
                 <a:solidFill>
                   <a:srgbClr val="1A1A1A"/>
                 </a:solidFill>
@@ -12424,13 +13075,13 @@
           <a:p>
             <a:pPr marL="292608" indent="-256032">
               <a:spcAft>
-                <a:spcPts val="400"/>
+                <a:spcPts val="300"/>
               </a:spcAft>
               <a:buFont typeface="Arial"/>
               <a:buChar char="•"/>
             </a:pPr>
             <a:r>
-              <a:rPr b="1" sz="1800">
+              <a:rPr b="1" sz="1700">
                 <a:solidFill>
                   <a:srgbClr val="1A1A1A"/>
                 </a:solidFill>
@@ -12439,25 +13090,25 @@
               <a:t>Easy to use - </a:t>
             </a:r>
             <a:r>
-              <a:rPr sz="1800">
+              <a:rPr sz="1700">
                 <a:solidFill>
                   <a:srgbClr val="1A1A1A"/>
                 </a:solidFill>
                 <a:latin typeface="Calibri"/>
               </a:rPr>
-              <a:t>officer takes one photo, gets the result in seconds.</a:t>
+              <a:t>one photo, result in seconds; card can be printed on the kit pouch.</a:t>
             </a:r>
           </a:p>
           <a:p>
             <a:pPr marL="292608" indent="-256032">
               <a:spcAft>
-                <a:spcPts val="400"/>
+                <a:spcPts val="300"/>
               </a:spcAft>
               <a:buFont typeface="Arial"/>
               <a:buChar char="•"/>
             </a:pPr>
             <a:r>
-              <a:rPr b="1" sz="1800">
+              <a:rPr b="1" sz="1700">
                 <a:solidFill>
                   <a:srgbClr val="1A1A1A"/>
                 </a:solidFill>
@@ -12466,7 +13117,7 @@
               <a:t>Low cost - </a:t>
             </a:r>
             <a:r>
-              <a:rPr sz="1800">
+              <a:rPr sz="1700">
                 <a:solidFill>
                   <a:srgbClr val="1A1A1A"/>
                 </a:solidFill>
@@ -12478,28 +13129,28 @@
           <a:p>
             <a:pPr marL="292608" indent="-256032">
               <a:spcAft>
-                <a:spcPts val="400"/>
+                <a:spcPts val="300"/>
               </a:spcAft>
               <a:buFont typeface="Arial"/>
               <a:buChar char="•"/>
             </a:pPr>
             <a:r>
-              <a:rPr b="1" sz="1800">
+              <a:rPr b="1" sz="1700">
                 <a:solidFill>
                   <a:srgbClr val="1A1A1A"/>
                 </a:solidFill>
                 <a:latin typeface="Calibri"/>
               </a:rPr>
-              <a:t>Scalable - </a:t>
-            </a:r>
-            <a:r>
-              <a:rPr sz="1800">
+              <a:t>Data plan - </a:t>
+            </a:r>
+            <a:r>
+              <a:rPr sz="1700">
                 <a:solidFill>
                   <a:srgbClr val="1A1A1A"/>
                 </a:solidFill>
                 <a:latin typeface="Calibri"/>
               </a:rPr>
-              <a:t>add any new kit from the website; works on any Android phone.</a:t>
+              <a:t>each kit calibrated with ~250 real photos (5 lights × 50) at an FSL.</a:t>
             </a:r>
           </a:p>
         </p:txBody>
@@ -13193,7 +13844,7 @@
                 </a:solidFill>
                 <a:latin typeface="Calibri"/>
               </a:rPr>
-              <a:t>Proof of every test: time, place, officer, photo</a:t>
+              <a:t>Proof for field tests in ~1.2 lakh NDPS cases a year (NCRB 2023)</a:t>
             </a:r>
           </a:p>
           <a:p>
@@ -14260,13 +14911,13 @@
           <a:p>
             <a:pPr marL="292608" indent="-256032">
               <a:spcAft>
-                <a:spcPts val="600"/>
+                <a:spcPts val="400"/>
               </a:spcAft>
               <a:buFont typeface="Arial"/>
               <a:buChar char="•"/>
             </a:pPr>
             <a:r>
-              <a:rPr b="1" sz="1900">
+              <a:rPr b="1" sz="1800">
                 <a:solidFill>
                   <a:srgbClr val="1A1A1A"/>
                 </a:solidFill>
@@ -14275,7 +14926,7 @@
               <a:t>Works offline - </a:t>
             </a:r>
             <a:r>
-              <a:rPr sz="1900">
+              <a:rPr sz="1800">
                 <a:solidFill>
                   <a:srgbClr val="1A1A1A"/>
                 </a:solidFill>
@@ -14287,13 +14938,13 @@
           <a:p>
             <a:pPr marL="292608" indent="-256032">
               <a:spcAft>
-                <a:spcPts val="600"/>
+                <a:spcPts val="400"/>
               </a:spcAft>
               <a:buFont typeface="Arial"/>
               <a:buChar char="•"/>
             </a:pPr>
             <a:r>
-              <a:rPr b="1" sz="1900">
+              <a:rPr b="1" sz="1800">
                 <a:solidFill>
                   <a:srgbClr val="1A1A1A"/>
                 </a:solidFill>
@@ -14302,7 +14953,7 @@
               <a:t>Phone security chip - </a:t>
             </a:r>
             <a:r>
-              <a:rPr sz="1900">
+              <a:rPr sz="1800">
                 <a:solidFill>
                   <a:srgbClr val="1A1A1A"/>
                 </a:solidFill>
@@ -14314,13 +14965,13 @@
           <a:p>
             <a:pPr marL="292608" indent="-256032">
               <a:spcAft>
-                <a:spcPts val="600"/>
+                <a:spcPts val="400"/>
               </a:spcAft>
               <a:buFont typeface="Arial"/>
               <a:buChar char="•"/>
             </a:pPr>
             <a:r>
-              <a:rPr b="1" sz="1900">
+              <a:rPr b="1" sz="1800">
                 <a:solidFill>
                   <a:srgbClr val="1A1A1A"/>
                 </a:solidFill>
@@ -14329,7 +14980,7 @@
               <a:t>Link with police systems - </a:t>
             </a:r>
             <a:r>
-              <a:rPr sz="1900">
+              <a:rPr sz="1800">
                 <a:solidFill>
                   <a:srgbClr val="1A1A1A"/>
                 </a:solidFill>
@@ -14341,13 +14992,13 @@
           <a:p>
             <a:pPr marL="292608" indent="-256032">
               <a:spcAft>
-                <a:spcPts val="600"/>
+                <a:spcPts val="400"/>
               </a:spcAft>
               <a:buFont typeface="Arial"/>
               <a:buChar char="•"/>
             </a:pPr>
             <a:r>
-              <a:rPr b="1" sz="1900">
+              <a:rPr b="1" sz="1800">
                 <a:solidFill>
                   <a:srgbClr val="1A1A1A"/>
                 </a:solidFill>
@@ -14356,7 +15007,7 @@
               <a:t>Match with lab results - </a:t>
             </a:r>
             <a:r>
-              <a:rPr sz="1900">
+              <a:rPr sz="1800">
                 <a:solidFill>
                   <a:srgbClr val="1A1A1A"/>
                 </a:solidFill>
@@ -14368,13 +15019,13 @@
           <a:p>
             <a:pPr marL="292608" indent="-256032">
               <a:spcAft>
-                <a:spcPts val="600"/>
+                <a:spcPts val="400"/>
               </a:spcAft>
               <a:buFont typeface="Arial"/>
               <a:buChar char="•"/>
             </a:pPr>
             <a:r>
-              <a:rPr b="1" sz="1900">
+              <a:rPr b="1" sz="1800">
                 <a:solidFill>
                   <a:srgbClr val="1A1A1A"/>
                 </a:solidFill>
@@ -14383,13 +15034,40 @@
               <a:t>Hindi + regional languages - </a:t>
             </a:r>
             <a:r>
-              <a:rPr sz="1900">
+              <a:rPr sz="1800">
                 <a:solidFill>
                   <a:srgbClr val="1A1A1A"/>
                 </a:solidFill>
                 <a:latin typeface="Calibri"/>
               </a:rPr>
               <a:t>with voice help</a:t>
+            </a:r>
+          </a:p>
+          <a:p>
+            <a:pPr marL="292608" indent="-256032">
+              <a:spcAft>
+                <a:spcPts val="400"/>
+              </a:spcAft>
+              <a:buFont typeface="Arial"/>
+              <a:buChar char="•"/>
+            </a:pPr>
+            <a:r>
+              <a:rPr b="1" sz="1800">
+                <a:solidFill>
+                  <a:srgbClr val="1A1A1A"/>
+                </a:solidFill>
+                <a:latin typeface="Calibri"/>
+              </a:rPr>
+              <a:t>Card on the kit pouch - </a:t>
+            </a:r>
+            <a:r>
+              <a:rPr sz="1800">
+                <a:solidFill>
+                  <a:srgbClr val="1A1A1A"/>
+                </a:solidFill>
+                <a:latin typeface="Calibri"/>
+              </a:rPr>
+              <a:t>no loose card to carry</a:t>
             </a:r>
           </a:p>
         </p:txBody>
@@ -14651,360 +15329,6 @@
           </a:blipFill>
         </p:spPr>
       </p:sp>
-      <p:graphicFrame>
-        <p:nvGraphicFramePr>
-          <p:cNvPr name="Table 9" id="9"/>
-          <p:cNvGraphicFramePr>
-            <a:graphicFrameLocks noGrp="true"/>
-          </p:cNvGraphicFramePr>
-          <p:nvPr/>
-        </p:nvGraphicFramePr>
-        <p:xfrm>
-          <a:off x="12443239" y="1783080"/>
-          <a:ext cx="4816061" cy="4692661"/>
-        </p:xfrm>
-        <a:graphic>
-          <a:graphicData uri="http://schemas.openxmlformats.org/drawingml/2006/table">
-            <a:tbl>
-              <a:tblPr/>
-              <a:tblGrid>
-                <a:gridCol w="4816061"/>
-              </a:tblGrid>
-              <a:tr h="744461">
-                <a:tc>
-                  <a:txBody>
-                    <a:bodyPr anchor="t" rtlCol="false"/>
-                    <a:lstStyle/>
-                    <a:p>
-                      <a:pPr algn="ctr">
-                        <a:lnSpc>
-                          <a:spcPts val="2520"/>
-                        </a:lnSpc>
-                        <a:defRPr/>
-                      </a:pPr>
-                      <a:r>
-                        <a:rPr lang="en-US" sz="1800" b="true">
-                          <a:solidFill>
-                            <a:srgbClr val="000000"/>
-                          </a:solidFill>
-                          <a:latin typeface="Canva Sans Bold"/>
-                          <a:ea typeface="Canva Sans Bold"/>
-                          <a:cs typeface="Canva Sans Bold"/>
-                          <a:sym typeface="Canva Sans Bold"/>
-                        </a:rPr>
-                        <a:t>Official Sources</a:t>
-                      </a:r>
-                      <a:endParaRPr lang="en-US" sz="1100"/>
-                    </a:p>
-                  </a:txBody>
-                  <a:tcPr marL="190500" marR="190500" marT="190500" marB="190500" anchor="ctr">
-                    <a:lnL cmpd="sng" algn="ctr" cap="flat" w="9525">
-                      <a:solidFill>
-                        <a:srgbClr val="17375E"/>
-                      </a:solidFill>
-                      <a:prstDash val="solid"/>
-                      <a:round/>
-                      <a:headEnd type="none" w="med" len="med"/>
-                      <a:tailEnd type="none" w="med" len="med"/>
-                    </a:lnL>
-                    <a:lnR cmpd="sng" algn="ctr" cap="flat" w="9525">
-                      <a:solidFill>
-                        <a:srgbClr val="17375E"/>
-                      </a:solidFill>
-                      <a:prstDash val="solid"/>
-                      <a:round/>
-                      <a:headEnd type="none" w="med" len="med"/>
-                      <a:tailEnd type="none" w="med" len="med"/>
-                    </a:lnR>
-                    <a:lnT cmpd="sng" algn="ctr" cap="flat" w="9525">
-                      <a:solidFill>
-                        <a:srgbClr val="17375E"/>
-                      </a:solidFill>
-                      <a:prstDash val="solid"/>
-                      <a:round/>
-                      <a:headEnd type="none" w="med" len="med"/>
-                      <a:tailEnd type="none" w="med" len="med"/>
-                    </a:lnT>
-                    <a:lnB cmpd="sng" algn="ctr" cap="flat" w="9525">
-                      <a:solidFill>
-                        <a:srgbClr val="17375E"/>
-                      </a:solidFill>
-                      <a:prstDash val="solid"/>
-                      <a:round/>
-                      <a:headEnd type="none" w="med" len="med"/>
-                      <a:tailEnd type="none" w="med" len="med"/>
-                    </a:lnB>
-                    <a:solidFill>
-                      <a:srgbClr val="D0D6E8"/>
-                    </a:solidFill>
-                  </a:tcPr>
-                </a:tc>
-              </a:tr>
-              <a:tr h="1317123">
-                <a:tc>
-                  <a:txBody>
-                    <a:bodyPr anchor="t" rtlCol="false"/>
-                    <a:lstStyle/>
-                    <a:p>
-                      <a:pPr algn="ctr">
-                        <a:lnSpc>
-                          <a:spcPts val="2380"/>
-                        </a:lnSpc>
-                        <a:defRPr/>
-                      </a:pPr>
-                      <a:r>
-                        <a:rPr lang="en-US" sz="1700">
-                          <a:solidFill>
-                            <a:srgbClr val="000000"/>
-                          </a:solidFill>
-                          <a:latin typeface="Canva Sans"/>
-                          <a:ea typeface="Canva Sans"/>
-                          <a:cs typeface="Canva Sans"/>
-                          <a:sym typeface="Canva Sans"/>
-                        </a:rPr>
-                        <a:t>NDPS Act (drug law) &amp; Sampling Rules 2022</a:t>
-                      </a:r>
-                      <a:endParaRPr lang="en-US" sz="1100"/>
-                    </a:p>
-                    <a:p>
-                      <a:pPr algn="ctr">
-                        <a:lnSpc>
-                          <a:spcPts val="2380"/>
-                        </a:lnSpc>
-                      </a:pPr>
-                      <a:r>
-                        <a:rPr lang="en-US" sz="1700" u="sng">
-                          <a:solidFill>
-                            <a:srgbClr val="006EC0"/>
-                          </a:solidFill>
-                          <a:latin typeface="Canva Sans"/>
-                          <a:ea typeface="Canva Sans"/>
-                          <a:cs typeface="Canva Sans"/>
-                          <a:sym typeface="Canva Sans"/>
-                          <a:hlinkClick r:id="rId6"/>
-                        </a:rPr>
-                        <a:t>https://www.indiacode.nic.in/handle/123456789/1791</a:t>
-                      </a:r>
-                    </a:p>
-                  </a:txBody>
-                  <a:tcPr marL="190500" marR="190500" marT="190500" marB="190500" anchor="ctr">
-                    <a:lnL cmpd="sng" algn="ctr" cap="flat" w="9525">
-                      <a:solidFill>
-                        <a:srgbClr val="17375E"/>
-                      </a:solidFill>
-                      <a:prstDash val="solid"/>
-                      <a:round/>
-                      <a:headEnd type="none" w="med" len="med"/>
-                      <a:tailEnd type="none" w="med" len="med"/>
-                    </a:lnL>
-                    <a:lnR cmpd="sng" algn="ctr" cap="flat" w="9525">
-                      <a:solidFill>
-                        <a:srgbClr val="17375E"/>
-                      </a:solidFill>
-                      <a:prstDash val="solid"/>
-                      <a:round/>
-                      <a:headEnd type="none" w="med" len="med"/>
-                      <a:tailEnd type="none" w="med" len="med"/>
-                    </a:lnR>
-                    <a:lnT cmpd="sng" algn="ctr" cap="flat" w="9525">
-                      <a:solidFill>
-                        <a:srgbClr val="17375E"/>
-                      </a:solidFill>
-                      <a:prstDash val="solid"/>
-                      <a:round/>
-                      <a:headEnd type="none" w="med" len="med"/>
-                      <a:tailEnd type="none" w="med" len="med"/>
-                    </a:lnT>
-                    <a:lnB cmpd="sng" algn="ctr" cap="flat" w="9525">
-                      <a:solidFill>
-                        <a:srgbClr val="17375E"/>
-                      </a:solidFill>
-                      <a:prstDash val="solid"/>
-                      <a:round/>
-                      <a:headEnd type="none" w="med" len="med"/>
-                      <a:tailEnd type="none" w="med" len="med"/>
-                    </a:lnB>
-                  </a:tcPr>
-                </a:tc>
-              </a:tr>
-              <a:tr h="1317123">
-                <a:tc>
-                  <a:txBody>
-                    <a:bodyPr anchor="t" rtlCol="false"/>
-                    <a:lstStyle/>
-                    <a:p>
-                      <a:pPr algn="ctr">
-                        <a:lnSpc>
-                          <a:spcPts val="2380"/>
-                        </a:lnSpc>
-                        <a:defRPr/>
-                      </a:pPr>
-                      <a:r>
-                        <a:rPr lang="en-US" sz="1700">
-                          <a:solidFill>
-                            <a:srgbClr val="000000"/>
-                          </a:solidFill>
-                          <a:latin typeface="Canva Sans"/>
-                          <a:ea typeface="Canva Sans"/>
-                          <a:cs typeface="Canva Sans"/>
-                          <a:sym typeface="Canva Sans"/>
-                        </a:rPr>
-                        <a:t>NCB Field Officers' Handbook</a:t>
-                      </a:r>
-                      <a:endParaRPr lang="en-US" sz="1100"/>
-                    </a:p>
-                    <a:p>
-                      <a:pPr algn="ctr">
-                        <a:lnSpc>
-                          <a:spcPts val="2380"/>
-                        </a:lnSpc>
-                      </a:pPr>
-                      <a:r>
-                        <a:rPr lang="en-US" sz="1700" u="sng">
-                          <a:solidFill>
-                            <a:srgbClr val="006EC0"/>
-                          </a:solidFill>
-                          <a:latin typeface="Canva Sans"/>
-                          <a:ea typeface="Canva Sans"/>
-                          <a:cs typeface="Canva Sans"/>
-                          <a:sym typeface="Canva Sans"/>
-                          <a:hlinkClick r:id="rId7"/>
-                        </a:rPr>
-                        <a:t>https://narcoticsindia.nic.in/DLEA/1.pdf</a:t>
-                      </a:r>
-                    </a:p>
-                  </a:txBody>
-                  <a:tcPr marL="190500" marR="190500" marT="190500" marB="190500" anchor="ctr">
-                    <a:lnL cmpd="sng" algn="ctr" cap="flat" w="9525">
-                      <a:solidFill>
-                        <a:srgbClr val="17375E"/>
-                      </a:solidFill>
-                      <a:prstDash val="solid"/>
-                      <a:round/>
-                      <a:headEnd type="none" w="med" len="med"/>
-                      <a:tailEnd type="none" w="med" len="med"/>
-                    </a:lnL>
-                    <a:lnR cmpd="sng" algn="ctr" cap="flat" w="9525">
-                      <a:solidFill>
-                        <a:srgbClr val="17375E"/>
-                      </a:solidFill>
-                      <a:prstDash val="solid"/>
-                      <a:round/>
-                      <a:headEnd type="none" w="med" len="med"/>
-                      <a:tailEnd type="none" w="med" len="med"/>
-                    </a:lnR>
-                    <a:lnT cmpd="sng" algn="ctr" cap="flat" w="9525">
-                      <a:solidFill>
-                        <a:srgbClr val="17375E"/>
-                      </a:solidFill>
-                      <a:prstDash val="solid"/>
-                      <a:round/>
-                      <a:headEnd type="none" w="med" len="med"/>
-                      <a:tailEnd type="none" w="med" len="med"/>
-                    </a:lnT>
-                    <a:lnB cmpd="sng" algn="ctr" cap="flat" w="9525">
-                      <a:solidFill>
-                        <a:srgbClr val="17375E"/>
-                      </a:solidFill>
-                      <a:prstDash val="solid"/>
-                      <a:round/>
-                      <a:headEnd type="none" w="med" len="med"/>
-                      <a:tailEnd type="none" w="med" len="med"/>
-                    </a:lnB>
-                  </a:tcPr>
-                </a:tc>
-              </a:tr>
-              <a:tr h="1313953">
-                <a:tc>
-                  <a:txBody>
-                    <a:bodyPr anchor="t" rtlCol="false"/>
-                    <a:lstStyle/>
-                    <a:p>
-                      <a:pPr algn="ctr">
-                        <a:lnSpc>
-                          <a:spcPts val="2379"/>
-                        </a:lnSpc>
-                        <a:defRPr/>
-                      </a:pPr>
-                      <a:r>
-                        <a:rPr lang="en-US" sz="1699">
-                          <a:solidFill>
-                            <a:srgbClr val="000000"/>
-                          </a:solidFill>
-                          <a:latin typeface="Canva Sans"/>
-                          <a:ea typeface="Canva Sans"/>
-                          <a:cs typeface="Canva Sans"/>
-                          <a:sym typeface="Canva Sans"/>
-                        </a:rPr>
-                        <a:t>UNODC Drug Field-Testing Manual</a:t>
-                      </a:r>
-                      <a:endParaRPr lang="en-US" sz="1100"/>
-                    </a:p>
-                    <a:p>
-                      <a:pPr algn="ctr">
-                        <a:lnSpc>
-                          <a:spcPts val="2379"/>
-                        </a:lnSpc>
-                      </a:pPr>
-                      <a:r>
-                        <a:rPr lang="en-US" sz="1699" u="sng">
-                          <a:solidFill>
-                            <a:srgbClr val="006EC0"/>
-                          </a:solidFill>
-                          <a:latin typeface="Canva Sans"/>
-                          <a:ea typeface="Canva Sans"/>
-                          <a:cs typeface="Canva Sans"/>
-                          <a:sym typeface="Canva Sans"/>
-                          <a:hlinkClick r:id="rId8"/>
-                        </a:rPr>
-                        <a:t>https://www.unodc.org/documents/scientific/Rapid_Testing_Methods_of_Drugs_of_Abuse_E.pdf</a:t>
-                      </a:r>
-                    </a:p>
-                  </a:txBody>
-                  <a:tcPr marL="190500" marR="190500" marT="190500" marB="190500" anchor="ctr">
-                    <a:lnL cmpd="sng" algn="ctr" cap="flat" w="9525">
-                      <a:solidFill>
-                        <a:srgbClr val="17375E"/>
-                      </a:solidFill>
-                      <a:prstDash val="solid"/>
-                      <a:round/>
-                      <a:headEnd type="none" w="med" len="med"/>
-                      <a:tailEnd type="none" w="med" len="med"/>
-                    </a:lnL>
-                    <a:lnR cmpd="sng" algn="ctr" cap="flat" w="9525">
-                      <a:solidFill>
-                        <a:srgbClr val="17375E"/>
-                      </a:solidFill>
-                      <a:prstDash val="solid"/>
-                      <a:round/>
-                      <a:headEnd type="none" w="med" len="med"/>
-                      <a:tailEnd type="none" w="med" len="med"/>
-                    </a:lnR>
-                    <a:lnT cmpd="sng" algn="ctr" cap="flat" w="9525">
-                      <a:solidFill>
-                        <a:srgbClr val="17375E"/>
-                      </a:solidFill>
-                      <a:prstDash val="solid"/>
-                      <a:round/>
-                      <a:headEnd type="none" w="med" len="med"/>
-                      <a:tailEnd type="none" w="med" len="med"/>
-                    </a:lnT>
-                    <a:lnB cmpd="sng" algn="ctr" cap="flat" w="9525">
-                      <a:solidFill>
-                        <a:srgbClr val="17375E"/>
-                      </a:solidFill>
-                      <a:prstDash val="solid"/>
-                      <a:round/>
-                      <a:headEnd type="none" w="med" len="med"/>
-                      <a:tailEnd type="none" w="med" len="med"/>
-                    </a:lnB>
-                  </a:tcPr>
-                </a:tc>
-              </a:tr>
-            </a:tbl>
-          </a:graphicData>
-        </a:graphic>
-      </p:graphicFrame>
       <p:sp>
         <p:nvSpPr>
           <p:cNvPr name="TextBox 10" id="10" descr="$PPTXTitle"/>
@@ -15136,7 +15460,7 @@
         </p:nvSpPr>
         <p:spPr>
           <a:xfrm rot="0">
-            <a:off x="8412480" y="8503919"/>
+            <a:off x="8412480" y="8183879"/>
             <a:ext cx="8229600" cy="381000"/>
           </a:xfrm>
           <a:prstGeom prst="rect">
@@ -15218,7 +15542,7 @@
         </p:nvSpPr>
         <p:spPr>
           <a:xfrm rot="0">
-            <a:off x="914400" y="8503919"/>
+            <a:off x="914400" y="8183879"/>
             <a:ext cx="3931920" cy="390525"/>
           </a:xfrm>
           <a:prstGeom prst="rect">
@@ -15274,7 +15598,7 @@
         </p:nvSpPr>
         <p:spPr>
           <a:xfrm rot="0">
-            <a:off x="4754880" y="8503919"/>
+            <a:off x="4754880" y="8183879"/>
             <a:ext cx="3200400" cy="361950"/>
           </a:xfrm>
           <a:prstGeom prst="rect">
@@ -15318,7 +15642,7 @@
         </p:nvGraphicFramePr>
         <p:xfrm>
           <a:off x="777240" y="1783080"/>
-          <a:ext cx="11384280" cy="6537960"/>
+          <a:ext cx="11384280" cy="5833872"/>
         </p:xfrm>
         <a:graphic>
           <a:graphicData uri="http://schemas.openxmlformats.org/drawingml/2006/table">
@@ -15426,7 +15750,7 @@
                   </a:tcPr>
                 </a:tc>
               </a:tr>
-              <a:tr h="868680">
+              <a:tr h="768096">
                 <a:tc>
                   <a:txBody>
                     <a:bodyPr wrap="square"/>
@@ -15533,7 +15857,7 @@
                   </a:tcPr>
                 </a:tc>
               </a:tr>
-              <a:tr h="868680">
+              <a:tr h="768096">
                 <a:tc>
                   <a:txBody>
                     <a:bodyPr wrap="square"/>
@@ -15640,7 +15964,7 @@
                   </a:tcPr>
                 </a:tc>
               </a:tr>
-              <a:tr h="868680">
+              <a:tr h="768096">
                 <a:tc>
                   <a:txBody>
                     <a:bodyPr wrap="square"/>
@@ -15747,7 +16071,7 @@
                   </a:tcPr>
                 </a:tc>
               </a:tr>
-              <a:tr h="868680">
+              <a:tr h="768096">
                 <a:tc>
                   <a:txBody>
                     <a:bodyPr wrap="square"/>
@@ -15854,7 +16178,7 @@
                   </a:tcPr>
                 </a:tc>
               </a:tr>
-              <a:tr h="868680">
+              <a:tr h="768096">
                 <a:tc>
                   <a:txBody>
                     <a:bodyPr wrap="square"/>
@@ -15961,7 +16285,7 @@
                   </a:tcPr>
                 </a:tc>
               </a:tr>
-              <a:tr h="868680">
+              <a:tr h="768096">
                 <a:tc>
                   <a:txBody>
                     <a:bodyPr wrap="square"/>
@@ -16068,7 +16392,7 @@
                   </a:tcPr>
                 </a:tc>
               </a:tr>
-              <a:tr h="868680">
+              <a:tr h="768096">
                 <a:tc>
                   <a:txBody>
                     <a:bodyPr wrap="square"/>
@@ -16179,6 +16503,1097 @@
           </a:graphicData>
         </a:graphic>
       </p:graphicFrame>
+      <p:sp>
+        <p:nvSpPr>
+          <p:cNvPr id="18" name="TextBox 17"/>
+          <p:cNvSpPr txBox="1"/>
+          <p:nvPr/>
+        </p:nvSpPr>
+        <p:spPr>
+          <a:xfrm>
+            <a:off x="822960" y="7708392"/>
+            <a:ext cx="11338560" cy="365760"/>
+          </a:xfrm>
+          <a:prstGeom prst="rect">
+            <a:avLst/>
+          </a:prstGeom>
+          <a:noFill/>
+        </p:spPr>
+        <p:txBody>
+          <a:bodyPr wrap="none">
+            <a:spAutoFit/>
+          </a:bodyPr>
+          <a:lstStyle/>
+          <a:p>
+            <a:r>
+              <a:rPr b="1" sz="1300">
+                <a:solidFill>
+                  <a:srgbClr val="1F3864"/>
+                </a:solidFill>
+                <a:latin typeface="Calibri"/>
+              </a:rPr>
+              <a:t>Official sources:  </a:t>
+            </a:r>
+            <a:r>
+              <a:rPr sz="1300" u="sng">
+                <a:solidFill>
+                  <a:srgbClr val="0563C1"/>
+                </a:solidFill>
+                <a:latin typeface="Calibri"/>
+                <a:hlinkClick r:id="rId19"/>
+              </a:rPr>
+              <a:t>NDPS Act &amp; Sampling Rules 2022</a:t>
+            </a:r>
+            <a:r>
+              <a:rPr sz="1300">
+                <a:latin typeface="Calibri"/>
+              </a:rPr>
+              <a:t>   ·   </a:t>
+            </a:r>
+            <a:r>
+              <a:rPr sz="1300" u="sng">
+                <a:solidFill>
+                  <a:srgbClr val="0563C1"/>
+                </a:solidFill>
+                <a:latin typeface="Calibri"/>
+                <a:hlinkClick r:id="rId20"/>
+              </a:rPr>
+              <a:t>NCB Field Officers' Handbook</a:t>
+            </a:r>
+            <a:r>
+              <a:rPr sz="1300">
+                <a:latin typeface="Calibri"/>
+              </a:rPr>
+              <a:t>   ·   </a:t>
+            </a:r>
+            <a:r>
+              <a:rPr sz="1300" u="sng">
+                <a:solidFill>
+                  <a:srgbClr val="0563C1"/>
+                </a:solidFill>
+                <a:latin typeface="Calibri"/>
+                <a:hlinkClick r:id="rId21"/>
+              </a:rPr>
+              <a:t>UNODC Drug Field-Testing Manual</a:t>
+            </a:r>
+            <a:r>
+              <a:rPr sz="1300">
+                <a:latin typeface="Calibri"/>
+              </a:rPr>
+              <a:t>   ·   </a:t>
+            </a:r>
+            <a:r>
+              <a:rPr sz="1300" u="sng">
+                <a:solidFill>
+                  <a:srgbClr val="0563C1"/>
+                </a:solidFill>
+                <a:latin typeface="Calibri"/>
+                <a:hlinkClick r:id="rId22"/>
+              </a:rPr>
+              <a:t>BNSS / BSA 2023 (MHA)</a:t>
+            </a:r>
+          </a:p>
+        </p:txBody>
+      </p:sp>
+      <p:sp>
+        <p:nvSpPr>
+          <p:cNvPr id="19" name="TextBox 18"/>
+          <p:cNvSpPr txBox="1"/>
+          <p:nvPr/>
+        </p:nvSpPr>
+        <p:spPr>
+          <a:xfrm>
+            <a:off x="12298680" y="1737360"/>
+            <a:ext cx="5486400" cy="411480"/>
+          </a:xfrm>
+          <a:prstGeom prst="rect">
+            <a:avLst/>
+          </a:prstGeom>
+          <a:noFill/>
+        </p:spPr>
+        <p:txBody>
+          <a:bodyPr wrap="square" anchor="t" lIns="45720" rIns="45720" tIns="18288" bIns="18288">
+            <a:spAutoFit/>
+          </a:bodyPr>
+          <a:lstStyle/>
+          <a:p>
+            <a:pPr algn="l"/>
+            <a:r>
+              <a:rPr sz="1800" b="1" i="0">
+                <a:solidFill>
+                  <a:srgbClr val="1F3864"/>
+                </a:solidFill>
+                <a:latin typeface="Calibri"/>
+              </a:rPr>
+              <a:t>Competitor Map - where we stand</a:t>
+            </a:r>
+          </a:p>
+        </p:txBody>
+      </p:sp>
+      <p:graphicFrame>
+        <p:nvGraphicFramePr>
+          <p:cNvPr id="20" name="Table 19"/>
+          <p:cNvGraphicFramePr>
+            <a:graphicFrameLocks noGrp="1"/>
+          </p:cNvGraphicFramePr>
+          <p:nvPr/>
+        </p:nvGraphicFramePr>
+        <p:xfrm>
+          <a:off x="12298680" y="2194560"/>
+          <a:ext cx="5404104" cy="3401568"/>
+        </p:xfrm>
+        <a:graphic>
+          <a:graphicData uri="http://schemas.openxmlformats.org/drawingml/2006/table">
+            <a:tbl>
+              <a:tblPr firstRow="1">
+                <a:tableStyleId>{5940675A-B579-460E-94D1-54222C63F5DA}</a:tableStyleId>
+              </a:tblPr>
+              <a:tblGrid>
+                <a:gridCol w="1783080"/>
+                <a:gridCol w="905256"/>
+                <a:gridCol w="905256"/>
+                <a:gridCol w="905256"/>
+                <a:gridCol w="905256"/>
+              </a:tblGrid>
+              <a:tr h="658368">
+                <a:tc>
+                  <a:txBody>
+                    <a:bodyPr wrap="square"/>
+                    <a:lstStyle/>
+                    <a:p>
+                      <a:pPr algn="l"/>
+                      <a:r>
+                        <a:rPr sz="1050" b="1">
+                          <a:solidFill>
+                            <a:srgbClr val="1F3864"/>
+                          </a:solidFill>
+                          <a:latin typeface="Calibri"/>
+                        </a:rPr>
+                        <a:t>Option</a:t>
+                      </a:r>
+                    </a:p>
+                  </a:txBody>
+                  <a:tcPr anchor="ctr" marL="64008" marR="64008" marT="27432" marB="27432">
+                    <a:solidFill>
+                      <a:srgbClr val="CFD5EA"/>
+                    </a:solidFill>
+                  </a:tcPr>
+                </a:tc>
+                <a:tc>
+                  <a:txBody>
+                    <a:bodyPr wrap="square"/>
+                    <a:lstStyle/>
+                    <a:p>
+                      <a:pPr algn="ctr"/>
+                      <a:r>
+                        <a:rPr sz="1050" b="1">
+                          <a:solidFill>
+                            <a:srgbClr val="1F3864"/>
+                          </a:solidFill>
+                          <a:latin typeface="Calibri"/>
+                        </a:rPr>
+                        <a:t>Works with existing kits</a:t>
+                      </a:r>
+                    </a:p>
+                  </a:txBody>
+                  <a:tcPr anchor="ctr" marL="64008" marR="64008" marT="27432" marB="27432">
+                    <a:solidFill>
+                      <a:srgbClr val="CFD5EA"/>
+                    </a:solidFill>
+                  </a:tcPr>
+                </a:tc>
+                <a:tc>
+                  <a:txBody>
+                    <a:bodyPr wrap="square"/>
+                    <a:lstStyle/>
+                    <a:p>
+                      <a:pPr algn="ctr"/>
+                      <a:r>
+                        <a:rPr sz="1050" b="1">
+                          <a:solidFill>
+                            <a:srgbClr val="1F3864"/>
+                          </a:solidFill>
+                          <a:latin typeface="Calibri"/>
+                        </a:rPr>
+                        <a:t>No new hardware</a:t>
+                      </a:r>
+                    </a:p>
+                  </a:txBody>
+                  <a:tcPr anchor="ctr" marL="64008" marR="64008" marT="27432" marB="27432">
+                    <a:solidFill>
+                      <a:srgbClr val="CFD5EA"/>
+                    </a:solidFill>
+                  </a:tcPr>
+                </a:tc>
+                <a:tc>
+                  <a:txBody>
+                    <a:bodyPr wrap="square"/>
+                    <a:lstStyle/>
+                    <a:p>
+                      <a:pPr algn="ctr"/>
+                      <a:r>
+                        <a:rPr sz="1050" b="1">
+                          <a:solidFill>
+                            <a:srgbClr val="1F3864"/>
+                          </a:solidFill>
+                          <a:latin typeface="Calibri"/>
+                        </a:rPr>
+                        <a:t>Objective reading</a:t>
+                      </a:r>
+                    </a:p>
+                  </a:txBody>
+                  <a:tcPr anchor="ctr" marL="64008" marR="64008" marT="27432" marB="27432">
+                    <a:solidFill>
+                      <a:srgbClr val="CFD5EA"/>
+                    </a:solidFill>
+                  </a:tcPr>
+                </a:tc>
+                <a:tc>
+                  <a:txBody>
+                    <a:bodyPr wrap="square"/>
+                    <a:lstStyle/>
+                    <a:p>
+                      <a:pPr algn="ctr"/>
+                      <a:r>
+                        <a:rPr sz="1050" b="1">
+                          <a:solidFill>
+                            <a:srgbClr val="1F3864"/>
+                          </a:solidFill>
+                          <a:latin typeface="Calibri"/>
+                        </a:rPr>
+                        <a:t>Signed proof</a:t>
+                      </a:r>
+                    </a:p>
+                  </a:txBody>
+                  <a:tcPr anchor="ctr" marL="64008" marR="64008" marT="27432" marB="27432">
+                    <a:solidFill>
+                      <a:srgbClr val="CFD5EA"/>
+                    </a:solidFill>
+                  </a:tcPr>
+                </a:tc>
+              </a:tr>
+              <a:tr h="457200">
+                <a:tc>
+                  <a:txBody>
+                    <a:bodyPr wrap="square"/>
+                    <a:lstStyle/>
+                    <a:p>
+                      <a:pPr algn="l"/>
+                      <a:r>
+                        <a:rPr sz="1150" b="0">
+                          <a:solidFill>
+                            <a:srgbClr val="1A1A1A"/>
+                          </a:solidFill>
+                          <a:latin typeface="Calibri"/>
+                        </a:rPr>
+                        <a:t>Officer's eye (today)</a:t>
+                      </a:r>
+                    </a:p>
+                  </a:txBody>
+                  <a:tcPr anchor="ctr" marL="64008" marR="64008" marT="27432" marB="27432">
+                    <a:solidFill>
+                      <a:srgbClr val="FFFFFF"/>
+                    </a:solidFill>
+                  </a:tcPr>
+                </a:tc>
+                <a:tc>
+                  <a:txBody>
+                    <a:bodyPr wrap="square"/>
+                    <a:lstStyle/>
+                    <a:p>
+                      <a:pPr algn="ctr"/>
+                      <a:r>
+                        <a:rPr sz="1600" b="1">
+                          <a:solidFill>
+                            <a:srgbClr val="2E7D32"/>
+                          </a:solidFill>
+                          <a:latin typeface="Calibri"/>
+                        </a:rPr>
+                        <a:t>✓</a:t>
+                      </a:r>
+                    </a:p>
+                  </a:txBody>
+                  <a:tcPr anchor="ctr" marL="64008" marR="64008" marT="27432" marB="27432">
+                    <a:solidFill>
+                      <a:srgbClr val="FFFFFF"/>
+                    </a:solidFill>
+                  </a:tcPr>
+                </a:tc>
+                <a:tc>
+                  <a:txBody>
+                    <a:bodyPr wrap="square"/>
+                    <a:lstStyle/>
+                    <a:p>
+                      <a:pPr algn="ctr"/>
+                      <a:r>
+                        <a:rPr sz="1600" b="1">
+                          <a:solidFill>
+                            <a:srgbClr val="2E7D32"/>
+                          </a:solidFill>
+                          <a:latin typeface="Calibri"/>
+                        </a:rPr>
+                        <a:t>✓</a:t>
+                      </a:r>
+                    </a:p>
+                  </a:txBody>
+                  <a:tcPr anchor="ctr" marL="64008" marR="64008" marT="27432" marB="27432">
+                    <a:solidFill>
+                      <a:srgbClr val="FFFFFF"/>
+                    </a:solidFill>
+                  </a:tcPr>
+                </a:tc>
+                <a:tc>
+                  <a:txBody>
+                    <a:bodyPr wrap="square"/>
+                    <a:lstStyle/>
+                    <a:p>
+                      <a:pPr algn="ctr"/>
+                      <a:r>
+                        <a:rPr sz="1600" b="1">
+                          <a:solidFill>
+                            <a:srgbClr val="C62828"/>
+                          </a:solidFill>
+                          <a:latin typeface="Calibri"/>
+                        </a:rPr>
+                        <a:t>✗</a:t>
+                      </a:r>
+                    </a:p>
+                  </a:txBody>
+                  <a:tcPr anchor="ctr" marL="64008" marR="64008" marT="27432" marB="27432">
+                    <a:solidFill>
+                      <a:srgbClr val="FFFFFF"/>
+                    </a:solidFill>
+                  </a:tcPr>
+                </a:tc>
+                <a:tc>
+                  <a:txBody>
+                    <a:bodyPr wrap="square"/>
+                    <a:lstStyle/>
+                    <a:p>
+                      <a:pPr algn="ctr"/>
+                      <a:r>
+                        <a:rPr sz="1600" b="1">
+                          <a:solidFill>
+                            <a:srgbClr val="C62828"/>
+                          </a:solidFill>
+                          <a:latin typeface="Calibri"/>
+                        </a:rPr>
+                        <a:t>✗</a:t>
+                      </a:r>
+                    </a:p>
+                  </a:txBody>
+                  <a:tcPr anchor="ctr" marL="64008" marR="64008" marT="27432" marB="27432">
+                    <a:solidFill>
+                      <a:srgbClr val="FFFFFF"/>
+                    </a:solidFill>
+                  </a:tcPr>
+                </a:tc>
+              </a:tr>
+              <a:tr h="457200">
+                <a:tc>
+                  <a:txBody>
+                    <a:bodyPr wrap="square"/>
+                    <a:lstStyle/>
+                    <a:p>
+                      <a:pPr algn="l"/>
+                      <a:r>
+                        <a:rPr sz="1150" b="0">
+                          <a:solidFill>
+                            <a:srgbClr val="1A1A1A"/>
+                          </a:solidFill>
+                          <a:latin typeface="Calibri"/>
+                        </a:rPr>
+                        <a:t>DetectaChem app (USA)</a:t>
+                      </a:r>
+                    </a:p>
+                  </a:txBody>
+                  <a:tcPr anchor="ctr" marL="64008" marR="64008" marT="27432" marB="27432">
+                    <a:solidFill>
+                      <a:srgbClr val="F4F6FB"/>
+                    </a:solidFill>
+                  </a:tcPr>
+                </a:tc>
+                <a:tc>
+                  <a:txBody>
+                    <a:bodyPr wrap="square"/>
+                    <a:lstStyle/>
+                    <a:p>
+                      <a:pPr algn="ctr"/>
+                      <a:r>
+                        <a:rPr sz="1600" b="1">
+                          <a:solidFill>
+                            <a:srgbClr val="C62828"/>
+                          </a:solidFill>
+                          <a:latin typeface="Calibri"/>
+                        </a:rPr>
+                        <a:t>✗</a:t>
+                      </a:r>
+                    </a:p>
+                  </a:txBody>
+                  <a:tcPr anchor="ctr" marL="64008" marR="64008" marT="27432" marB="27432">
+                    <a:solidFill>
+                      <a:srgbClr val="F4F6FB"/>
+                    </a:solidFill>
+                  </a:tcPr>
+                </a:tc>
+                <a:tc>
+                  <a:txBody>
+                    <a:bodyPr wrap="square"/>
+                    <a:lstStyle/>
+                    <a:p>
+                      <a:pPr algn="ctr"/>
+                      <a:r>
+                        <a:rPr sz="1600" b="1">
+                          <a:solidFill>
+                            <a:srgbClr val="2E7D32"/>
+                          </a:solidFill>
+                          <a:latin typeface="Calibri"/>
+                        </a:rPr>
+                        <a:t>✓</a:t>
+                      </a:r>
+                    </a:p>
+                  </a:txBody>
+                  <a:tcPr anchor="ctr" marL="64008" marR="64008" marT="27432" marB="27432">
+                    <a:solidFill>
+                      <a:srgbClr val="F4F6FB"/>
+                    </a:solidFill>
+                  </a:tcPr>
+                </a:tc>
+                <a:tc>
+                  <a:txBody>
+                    <a:bodyPr wrap="square"/>
+                    <a:lstStyle/>
+                    <a:p>
+                      <a:pPr algn="ctr"/>
+                      <a:r>
+                        <a:rPr sz="1600" b="1">
+                          <a:solidFill>
+                            <a:srgbClr val="2E7D32"/>
+                          </a:solidFill>
+                          <a:latin typeface="Calibri"/>
+                        </a:rPr>
+                        <a:t>✓</a:t>
+                      </a:r>
+                    </a:p>
+                  </a:txBody>
+                  <a:tcPr anchor="ctr" marL="64008" marR="64008" marT="27432" marB="27432">
+                    <a:solidFill>
+                      <a:srgbClr val="F4F6FB"/>
+                    </a:solidFill>
+                  </a:tcPr>
+                </a:tc>
+                <a:tc>
+                  <a:txBody>
+                    <a:bodyPr wrap="square"/>
+                    <a:lstStyle/>
+                    <a:p>
+                      <a:pPr algn="ctr"/>
+                      <a:r>
+                        <a:rPr sz="1600" b="1">
+                          <a:solidFill>
+                            <a:srgbClr val="B26A00"/>
+                          </a:solidFill>
+                          <a:latin typeface="Calibri"/>
+                        </a:rPr>
+                        <a:t>~</a:t>
+                      </a:r>
+                    </a:p>
+                  </a:txBody>
+                  <a:tcPr anchor="ctr" marL="64008" marR="64008" marT="27432" marB="27432">
+                    <a:solidFill>
+                      <a:srgbClr val="F4F6FB"/>
+                    </a:solidFill>
+                  </a:tcPr>
+                </a:tc>
+              </a:tr>
+              <a:tr h="457200">
+                <a:tc>
+                  <a:txBody>
+                    <a:bodyPr wrap="square"/>
+                    <a:lstStyle/>
+                    <a:p>
+                      <a:pPr algn="l"/>
+                      <a:r>
+                        <a:rPr sz="1150" b="0">
+                          <a:solidFill>
+                            <a:srgbClr val="1A1A1A"/>
+                          </a:solidFill>
+                          <a:latin typeface="Calibri"/>
+                        </a:rPr>
+                        <a:t>TruNarc / Raman device</a:t>
+                      </a:r>
+                    </a:p>
+                  </a:txBody>
+                  <a:tcPr anchor="ctr" marL="64008" marR="64008" marT="27432" marB="27432">
+                    <a:solidFill>
+                      <a:srgbClr val="FFFFFF"/>
+                    </a:solidFill>
+                  </a:tcPr>
+                </a:tc>
+                <a:tc>
+                  <a:txBody>
+                    <a:bodyPr wrap="square"/>
+                    <a:lstStyle/>
+                    <a:p>
+                      <a:pPr algn="ctr"/>
+                      <a:r>
+                        <a:rPr sz="1600" b="1">
+                          <a:solidFill>
+                            <a:srgbClr val="2E7D32"/>
+                          </a:solidFill>
+                          <a:latin typeface="Calibri"/>
+                        </a:rPr>
+                        <a:t>✓</a:t>
+                      </a:r>
+                    </a:p>
+                  </a:txBody>
+                  <a:tcPr anchor="ctr" marL="64008" marR="64008" marT="27432" marB="27432">
+                    <a:solidFill>
+                      <a:srgbClr val="FFFFFF"/>
+                    </a:solidFill>
+                  </a:tcPr>
+                </a:tc>
+                <a:tc>
+                  <a:txBody>
+                    <a:bodyPr wrap="square"/>
+                    <a:lstStyle/>
+                    <a:p>
+                      <a:pPr algn="ctr"/>
+                      <a:r>
+                        <a:rPr sz="1600" b="1">
+                          <a:solidFill>
+                            <a:srgbClr val="C62828"/>
+                          </a:solidFill>
+                          <a:latin typeface="Calibri"/>
+                        </a:rPr>
+                        <a:t>✗</a:t>
+                      </a:r>
+                    </a:p>
+                  </a:txBody>
+                  <a:tcPr anchor="ctr" marL="64008" marR="64008" marT="27432" marB="27432">
+                    <a:solidFill>
+                      <a:srgbClr val="FFFFFF"/>
+                    </a:solidFill>
+                  </a:tcPr>
+                </a:tc>
+                <a:tc>
+                  <a:txBody>
+                    <a:bodyPr wrap="square"/>
+                    <a:lstStyle/>
+                    <a:p>
+                      <a:pPr algn="ctr"/>
+                      <a:r>
+                        <a:rPr sz="1600" b="1">
+                          <a:solidFill>
+                            <a:srgbClr val="2E7D32"/>
+                          </a:solidFill>
+                          <a:latin typeface="Calibri"/>
+                        </a:rPr>
+                        <a:t>✓</a:t>
+                      </a:r>
+                    </a:p>
+                  </a:txBody>
+                  <a:tcPr anchor="ctr" marL="64008" marR="64008" marT="27432" marB="27432">
+                    <a:solidFill>
+                      <a:srgbClr val="FFFFFF"/>
+                    </a:solidFill>
+                  </a:tcPr>
+                </a:tc>
+                <a:tc>
+                  <a:txBody>
+                    <a:bodyPr wrap="square"/>
+                    <a:lstStyle/>
+                    <a:p>
+                      <a:pPr algn="ctr"/>
+                      <a:r>
+                        <a:rPr sz="1600" b="1">
+                          <a:solidFill>
+                            <a:srgbClr val="B26A00"/>
+                          </a:solidFill>
+                          <a:latin typeface="Calibri"/>
+                        </a:rPr>
+                        <a:t>~</a:t>
+                      </a:r>
+                    </a:p>
+                  </a:txBody>
+                  <a:tcPr anchor="ctr" marL="64008" marR="64008" marT="27432" marB="27432">
+                    <a:solidFill>
+                      <a:srgbClr val="FFFFFF"/>
+                    </a:solidFill>
+                  </a:tcPr>
+                </a:tc>
+              </a:tr>
+              <a:tr h="457200">
+                <a:tc>
+                  <a:txBody>
+                    <a:bodyPr wrap="square"/>
+                    <a:lstStyle/>
+                    <a:p>
+                      <a:pPr algn="l"/>
+                      <a:r>
+                        <a:rPr sz="1150" b="0">
+                          <a:solidFill>
+                            <a:srgbClr val="1A1A1A"/>
+                          </a:solidFill>
+                          <a:latin typeface="Calibri"/>
+                        </a:rPr>
+                        <a:t>e-Sakshya app (MHA)</a:t>
+                      </a:r>
+                    </a:p>
+                  </a:txBody>
+                  <a:tcPr anchor="ctr" marL="64008" marR="64008" marT="27432" marB="27432">
+                    <a:solidFill>
+                      <a:srgbClr val="F4F6FB"/>
+                    </a:solidFill>
+                  </a:tcPr>
+                </a:tc>
+                <a:tc>
+                  <a:txBody>
+                    <a:bodyPr wrap="square"/>
+                    <a:lstStyle/>
+                    <a:p>
+                      <a:pPr algn="ctr"/>
+                      <a:r>
+                        <a:rPr sz="1600" b="1">
+                          <a:solidFill>
+                            <a:srgbClr val="2E7D32"/>
+                          </a:solidFill>
+                          <a:latin typeface="Calibri"/>
+                        </a:rPr>
+                        <a:t>✓</a:t>
+                      </a:r>
+                    </a:p>
+                  </a:txBody>
+                  <a:tcPr anchor="ctr" marL="64008" marR="64008" marT="27432" marB="27432">
+                    <a:solidFill>
+                      <a:srgbClr val="F4F6FB"/>
+                    </a:solidFill>
+                  </a:tcPr>
+                </a:tc>
+                <a:tc>
+                  <a:txBody>
+                    <a:bodyPr wrap="square"/>
+                    <a:lstStyle/>
+                    <a:p>
+                      <a:pPr algn="ctr"/>
+                      <a:r>
+                        <a:rPr sz="1600" b="1">
+                          <a:solidFill>
+                            <a:srgbClr val="2E7D32"/>
+                          </a:solidFill>
+                          <a:latin typeface="Calibri"/>
+                        </a:rPr>
+                        <a:t>✓</a:t>
+                      </a:r>
+                    </a:p>
+                  </a:txBody>
+                  <a:tcPr anchor="ctr" marL="64008" marR="64008" marT="27432" marB="27432">
+                    <a:solidFill>
+                      <a:srgbClr val="F4F6FB"/>
+                    </a:solidFill>
+                  </a:tcPr>
+                </a:tc>
+                <a:tc>
+                  <a:txBody>
+                    <a:bodyPr wrap="square"/>
+                    <a:lstStyle/>
+                    <a:p>
+                      <a:pPr algn="ctr"/>
+                      <a:r>
+                        <a:rPr sz="1600" b="1">
+                          <a:solidFill>
+                            <a:srgbClr val="C62828"/>
+                          </a:solidFill>
+                          <a:latin typeface="Calibri"/>
+                        </a:rPr>
+                        <a:t>✗</a:t>
+                      </a:r>
+                    </a:p>
+                  </a:txBody>
+                  <a:tcPr anchor="ctr" marL="64008" marR="64008" marT="27432" marB="27432">
+                    <a:solidFill>
+                      <a:srgbClr val="F4F6FB"/>
+                    </a:solidFill>
+                  </a:tcPr>
+                </a:tc>
+                <a:tc>
+                  <a:txBody>
+                    <a:bodyPr wrap="square"/>
+                    <a:lstStyle/>
+                    <a:p>
+                      <a:pPr algn="ctr"/>
+                      <a:r>
+                        <a:rPr sz="1600" b="1">
+                          <a:solidFill>
+                            <a:srgbClr val="2E7D32"/>
+                          </a:solidFill>
+                          <a:latin typeface="Calibri"/>
+                        </a:rPr>
+                        <a:t>✓</a:t>
+                      </a:r>
+                    </a:p>
+                  </a:txBody>
+                  <a:tcPr anchor="ctr" marL="64008" marR="64008" marT="27432" marB="27432">
+                    <a:solidFill>
+                      <a:srgbClr val="F4F6FB"/>
+                    </a:solidFill>
+                  </a:tcPr>
+                </a:tc>
+              </a:tr>
+              <a:tr h="457200">
+                <a:tc>
+                  <a:txBody>
+                    <a:bodyPr wrap="square"/>
+                    <a:lstStyle/>
+                    <a:p>
+                      <a:pPr algn="l"/>
+                      <a:r>
+                        <a:rPr sz="1150" b="0">
+                          <a:solidFill>
+                            <a:srgbClr val="1A1A1A"/>
+                          </a:solidFill>
+                          <a:latin typeface="Calibri"/>
+                        </a:rPr>
+                        <a:t>FSL lab test (GC-MS)</a:t>
+                      </a:r>
+                    </a:p>
+                  </a:txBody>
+                  <a:tcPr anchor="ctr" marL="64008" marR="64008" marT="27432" marB="27432">
+                    <a:solidFill>
+                      <a:srgbClr val="FFFFFF"/>
+                    </a:solidFill>
+                  </a:tcPr>
+                </a:tc>
+                <a:tc>
+                  <a:txBody>
+                    <a:bodyPr wrap="square"/>
+                    <a:lstStyle/>
+                    <a:p>
+                      <a:pPr algn="ctr"/>
+                      <a:r>
+                        <a:rPr sz="1600" b="1">
+                          <a:solidFill>
+                            <a:srgbClr val="404040"/>
+                          </a:solidFill>
+                          <a:latin typeface="Calibri"/>
+                        </a:rPr>
+                        <a:t>-</a:t>
+                      </a:r>
+                    </a:p>
+                  </a:txBody>
+                  <a:tcPr anchor="ctr" marL="64008" marR="64008" marT="27432" marB="27432">
+                    <a:solidFill>
+                      <a:srgbClr val="FFFFFF"/>
+                    </a:solidFill>
+                  </a:tcPr>
+                </a:tc>
+                <a:tc>
+                  <a:txBody>
+                    <a:bodyPr wrap="square"/>
+                    <a:lstStyle/>
+                    <a:p>
+                      <a:pPr algn="ctr"/>
+                      <a:r>
+                        <a:rPr sz="1600" b="1">
+                          <a:solidFill>
+                            <a:srgbClr val="C62828"/>
+                          </a:solidFill>
+                          <a:latin typeface="Calibri"/>
+                        </a:rPr>
+                        <a:t>✗</a:t>
+                      </a:r>
+                    </a:p>
+                  </a:txBody>
+                  <a:tcPr anchor="ctr" marL="64008" marR="64008" marT="27432" marB="27432">
+                    <a:solidFill>
+                      <a:srgbClr val="FFFFFF"/>
+                    </a:solidFill>
+                  </a:tcPr>
+                </a:tc>
+                <a:tc>
+                  <a:txBody>
+                    <a:bodyPr wrap="square"/>
+                    <a:lstStyle/>
+                    <a:p>
+                      <a:pPr algn="ctr"/>
+                      <a:r>
+                        <a:rPr sz="1600" b="1">
+                          <a:solidFill>
+                            <a:srgbClr val="2E7D32"/>
+                          </a:solidFill>
+                          <a:latin typeface="Calibri"/>
+                        </a:rPr>
+                        <a:t>✓</a:t>
+                      </a:r>
+                    </a:p>
+                  </a:txBody>
+                  <a:tcPr anchor="ctr" marL="64008" marR="64008" marT="27432" marB="27432">
+                    <a:solidFill>
+                      <a:srgbClr val="FFFFFF"/>
+                    </a:solidFill>
+                  </a:tcPr>
+                </a:tc>
+                <a:tc>
+                  <a:txBody>
+                    <a:bodyPr wrap="square"/>
+                    <a:lstStyle/>
+                    <a:p>
+                      <a:pPr algn="ctr"/>
+                      <a:r>
+                        <a:rPr sz="1600" b="1">
+                          <a:solidFill>
+                            <a:srgbClr val="2E7D32"/>
+                          </a:solidFill>
+                          <a:latin typeface="Calibri"/>
+                        </a:rPr>
+                        <a:t>✓</a:t>
+                      </a:r>
+                    </a:p>
+                  </a:txBody>
+                  <a:tcPr anchor="ctr" marL="64008" marR="64008" marT="27432" marB="27432">
+                    <a:solidFill>
+                      <a:srgbClr val="FFFFFF"/>
+                    </a:solidFill>
+                  </a:tcPr>
+                </a:tc>
+              </a:tr>
+              <a:tr h="457200">
+                <a:tc>
+                  <a:txBody>
+                    <a:bodyPr wrap="square"/>
+                    <a:lstStyle/>
+                    <a:p>
+                      <a:pPr algn="l"/>
+                      <a:r>
+                        <a:rPr sz="1150" b="1">
+                          <a:solidFill>
+                            <a:srgbClr val="1F3864"/>
+                          </a:solidFill>
+                          <a:latin typeface="Calibri"/>
+                        </a:rPr>
+                        <a:t>FieldProof (ours)</a:t>
+                      </a:r>
+                    </a:p>
+                  </a:txBody>
+                  <a:tcPr anchor="ctr" marL="64008" marR="64008" marT="27432" marB="27432">
+                    <a:solidFill>
+                      <a:srgbClr val="D9F2E3"/>
+                    </a:solidFill>
+                  </a:tcPr>
+                </a:tc>
+                <a:tc>
+                  <a:txBody>
+                    <a:bodyPr wrap="square"/>
+                    <a:lstStyle/>
+                    <a:p>
+                      <a:pPr algn="ctr"/>
+                      <a:r>
+                        <a:rPr sz="1600" b="1">
+                          <a:solidFill>
+                            <a:srgbClr val="2E7D32"/>
+                          </a:solidFill>
+                          <a:latin typeface="Calibri"/>
+                        </a:rPr>
+                        <a:t>✓</a:t>
+                      </a:r>
+                    </a:p>
+                  </a:txBody>
+                  <a:tcPr anchor="ctr" marL="64008" marR="64008" marT="27432" marB="27432">
+                    <a:solidFill>
+                      <a:srgbClr val="D9F2E3"/>
+                    </a:solidFill>
+                  </a:tcPr>
+                </a:tc>
+                <a:tc>
+                  <a:txBody>
+                    <a:bodyPr wrap="square"/>
+                    <a:lstStyle/>
+                    <a:p>
+                      <a:pPr algn="ctr"/>
+                      <a:r>
+                        <a:rPr sz="1600" b="1">
+                          <a:solidFill>
+                            <a:srgbClr val="2E7D32"/>
+                          </a:solidFill>
+                          <a:latin typeface="Calibri"/>
+                        </a:rPr>
+                        <a:t>✓</a:t>
+                      </a:r>
+                    </a:p>
+                  </a:txBody>
+                  <a:tcPr anchor="ctr" marL="64008" marR="64008" marT="27432" marB="27432">
+                    <a:solidFill>
+                      <a:srgbClr val="D9F2E3"/>
+                    </a:solidFill>
+                  </a:tcPr>
+                </a:tc>
+                <a:tc>
+                  <a:txBody>
+                    <a:bodyPr wrap="square"/>
+                    <a:lstStyle/>
+                    <a:p>
+                      <a:pPr algn="ctr"/>
+                      <a:r>
+                        <a:rPr sz="1600" b="1">
+                          <a:solidFill>
+                            <a:srgbClr val="2E7D32"/>
+                          </a:solidFill>
+                          <a:latin typeface="Calibri"/>
+                        </a:rPr>
+                        <a:t>✓</a:t>
+                      </a:r>
+                    </a:p>
+                  </a:txBody>
+                  <a:tcPr anchor="ctr" marL="64008" marR="64008" marT="27432" marB="27432">
+                    <a:solidFill>
+                      <a:srgbClr val="D9F2E3"/>
+                    </a:solidFill>
+                  </a:tcPr>
+                </a:tc>
+                <a:tc>
+                  <a:txBody>
+                    <a:bodyPr wrap="square"/>
+                    <a:lstStyle/>
+                    <a:p>
+                      <a:pPr algn="ctr"/>
+                      <a:r>
+                        <a:rPr sz="1600" b="1">
+                          <a:solidFill>
+                            <a:srgbClr val="2E7D32"/>
+                          </a:solidFill>
+                          <a:latin typeface="Calibri"/>
+                        </a:rPr>
+                        <a:t>✓</a:t>
+                      </a:r>
+                    </a:p>
+                  </a:txBody>
+                  <a:tcPr anchor="ctr" marL="64008" marR="64008" marT="27432" marB="27432">
+                    <a:solidFill>
+                      <a:srgbClr val="D9F2E3"/>
+                    </a:solidFill>
+                  </a:tcPr>
+                </a:tc>
+              </a:tr>
+            </a:tbl>
+          </a:graphicData>
+        </a:graphic>
+      </p:graphicFrame>
+      <p:sp>
+        <p:nvSpPr>
+          <p:cNvPr id="21" name="TextBox 20"/>
+          <p:cNvSpPr txBox="1"/>
+          <p:nvPr/>
+        </p:nvSpPr>
+        <p:spPr>
+          <a:xfrm>
+            <a:off x="12298680" y="5641848"/>
+            <a:ext cx="5394960" cy="274320"/>
+          </a:xfrm>
+          <a:prstGeom prst="rect">
+            <a:avLst/>
+          </a:prstGeom>
+          <a:noFill/>
+        </p:spPr>
+        <p:txBody>
+          <a:bodyPr wrap="square" anchor="t" lIns="45720" rIns="45720" tIns="18288" bIns="18288">
+            <a:spAutoFit/>
+          </a:bodyPr>
+          <a:lstStyle/>
+          <a:p>
+            <a:pPr algn="l"/>
+            <a:r>
+              <a:rPr sz="1100" b="0" i="0">
+                <a:solidFill>
+                  <a:srgbClr val="404040"/>
+                </a:solidFill>
+                <a:latin typeface="Calibri"/>
+              </a:rPr>
+              <a:t>✓ yes    ~ partly    ✗ no</a:t>
+            </a:r>
+          </a:p>
+        </p:txBody>
+      </p:sp>
+      <p:sp>
+        <p:nvSpPr>
+          <p:cNvPr id="22" name="Rounded Rectangle 21"/>
+          <p:cNvSpPr/>
+          <p:nvPr/>
+        </p:nvSpPr>
+        <p:spPr>
+          <a:xfrm>
+            <a:off x="12298680" y="6007608"/>
+            <a:ext cx="5404104" cy="1097280"/>
+          </a:xfrm>
+          <a:prstGeom prst="roundRect">
+            <a:avLst>
+              <a:gd name="adj" fmla="val 12000"/>
+            </a:avLst>
+          </a:prstGeom>
+          <a:solidFill>
+            <a:srgbClr val="E8F5F3"/>
+          </a:solidFill>
+          <a:ln w="15875">
+            <a:solidFill>
+              <a:srgbClr val="0F766E"/>
+            </a:solidFill>
+          </a:ln>
+          <a:effectLst/>
+        </p:spPr>
+        <p:style>
+          <a:lnRef idx="1">
+            <a:schemeClr val="accent1"/>
+          </a:lnRef>
+          <a:fillRef idx="3">
+            <a:schemeClr val="accent1"/>
+          </a:fillRef>
+          <a:effectRef idx="2">
+            <a:schemeClr val="accent1"/>
+          </a:effectRef>
+          <a:fontRef idx="minor">
+            <a:schemeClr val="lt1"/>
+          </a:fontRef>
+        </p:style>
+        <p:txBody>
+          <a:bodyPr rtlCol="0" anchor="ctr" wrap="square" lIns="45720" rIns="45720" tIns="18288" bIns="18288"/>
+          <a:lstStyle/>
+          <a:p>
+            <a:pPr algn="ctr"/>
+            <a:r>
+              <a:rPr sz="1250" b="1">
+                <a:solidFill>
+                  <a:srgbClr val="0F4C46"/>
+                </a:solidFill>
+                <a:latin typeface="Calibri"/>
+              </a:rPr>
+              <a:t>Our edge: not just a colour reader.</a:t>
+            </a:r>
+          </a:p>
+          <a:p>
+            <a:pPr algn="ctr"/>
+            <a:r>
+              <a:rPr sz="1250" b="1">
+                <a:solidFill>
+                  <a:srgbClr val="0F4C46"/>
+                </a:solidFill>
+                <a:latin typeface="Calibri"/>
+              </a:rPr>
+              <a:t>The signed, chained evidence record</a:t>
+            </a:r>
+          </a:p>
+          <a:p>
+            <a:pPr algn="ctr"/>
+            <a:r>
+              <a:rPr sz="1250" b="1">
+                <a:solidFill>
+                  <a:srgbClr val="0F4C46"/>
+                </a:solidFill>
+                <a:latin typeface="Calibri"/>
+              </a:rPr>
+              <a:t>is the product - checkable by anyone.</a:t>
+            </a:r>
+          </a:p>
+        </p:txBody>
+      </p:sp>
     </p:spTree>
   </p:cSld>
   <p:clrMapOvr>

--- a/docs/SIH26231_FieldProof_HexTech.pptx
+++ b/docs/SIH26231_FieldProof_HexTech.pptx
@@ -15592,7 +15592,9 @@
       </p:sp>
       <p:sp>
         <p:nvSpPr>
-          <p:cNvPr name="TextBox 16" id="16"/>
+          <p:cNvPr name="TextBox 16" id="16">
+            <a:hlinkClick r:id="rId9"/>
+          </p:cNvPr>
           <p:cNvSpPr txBox="true"/>
           <p:nvPr/>
         </p:nvSpPr>
@@ -16505,106 +16507,322 @@
       </p:graphicFrame>
       <p:sp>
         <p:nvSpPr>
-          <p:cNvPr id="18" name="TextBox 17"/>
-          <p:cNvSpPr txBox="1"/>
-          <p:nvPr/>
-        </p:nvSpPr>
-        <p:spPr>
-          <a:xfrm>
-            <a:off x="822960" y="7708392"/>
-            <a:ext cx="11338560" cy="365760"/>
+          <p:cNvPr id="18" name="Rectangle 17">
+            <a:hlinkClick r:id="rId12"/>
+          </p:cNvPr>
+          <p:cNvSpPr/>
+          <p:nvPr/>
+        </p:nvSpPr>
+        <p:spPr>
+          <a:xfrm>
+            <a:off x="1188720" y="2240280"/>
+            <a:ext cx="4983480" cy="768096"/>
           </a:xfrm>
           <a:prstGeom prst="rect">
             <a:avLst/>
           </a:prstGeom>
           <a:noFill/>
-        </p:spPr>
-        <p:txBody>
-          <a:bodyPr wrap="none">
-            <a:spAutoFit/>
-          </a:bodyPr>
-          <a:lstStyle/>
-          <a:p>
-            <a:r>
-              <a:rPr b="1" sz="1300">
-                <a:solidFill>
-                  <a:srgbClr val="1F3864"/>
-                </a:solidFill>
-                <a:latin typeface="Calibri"/>
-              </a:rPr>
-              <a:t>Official sources:  </a:t>
-            </a:r>
-            <a:r>
-              <a:rPr sz="1300" u="sng">
-                <a:solidFill>
-                  <a:srgbClr val="0563C1"/>
-                </a:solidFill>
-                <a:latin typeface="Calibri"/>
-                <a:hlinkClick r:id="rId19"/>
-              </a:rPr>
-              <a:t>NDPS Act &amp; Sampling Rules 2022</a:t>
-            </a:r>
-            <a:r>
-              <a:rPr sz="1300">
-                <a:latin typeface="Calibri"/>
-              </a:rPr>
-              <a:t>   ·   </a:t>
-            </a:r>
-            <a:r>
-              <a:rPr sz="1300" u="sng">
-                <a:solidFill>
-                  <a:srgbClr val="0563C1"/>
-                </a:solidFill>
-                <a:latin typeface="Calibri"/>
-                <a:hlinkClick r:id="rId20"/>
-              </a:rPr>
-              <a:t>NCB Field Officers' Handbook</a:t>
-            </a:r>
-            <a:r>
-              <a:rPr sz="1300">
-                <a:latin typeface="Calibri"/>
-              </a:rPr>
-              <a:t>   ·   </a:t>
-            </a:r>
-            <a:r>
-              <a:rPr sz="1300" u="sng">
-                <a:solidFill>
-                  <a:srgbClr val="0563C1"/>
-                </a:solidFill>
-                <a:latin typeface="Calibri"/>
-                <a:hlinkClick r:id="rId21"/>
-              </a:rPr>
-              <a:t>UNODC Drug Field-Testing Manual</a:t>
-            </a:r>
-            <a:r>
-              <a:rPr sz="1300">
-                <a:latin typeface="Calibri"/>
-              </a:rPr>
-              <a:t>   ·   </a:t>
-            </a:r>
-            <a:r>
-              <a:rPr sz="1300" u="sng">
-                <a:solidFill>
-                  <a:srgbClr val="0563C1"/>
-                </a:solidFill>
-                <a:latin typeface="Calibri"/>
-                <a:hlinkClick r:id="rId22"/>
-              </a:rPr>
-              <a:t>BNSS / BSA 2023 (MHA)</a:t>
-            </a:r>
-          </a:p>
-        </p:txBody>
-      </p:sp>
-      <p:sp>
-        <p:nvSpPr>
-          <p:cNvPr id="19" name="TextBox 18"/>
+          <a:ln>
+            <a:noFill/>
+          </a:ln>
+          <a:effectLst/>
+        </p:spPr>
+        <p:style>
+          <a:lnRef idx="1">
+            <a:schemeClr val="accent1"/>
+          </a:lnRef>
+          <a:fillRef idx="3">
+            <a:schemeClr val="accent1"/>
+          </a:fillRef>
+          <a:effectRef idx="2">
+            <a:schemeClr val="accent1"/>
+          </a:effectRef>
+          <a:fontRef idx="minor">
+            <a:schemeClr val="lt1"/>
+          </a:fontRef>
+        </p:style>
+        <p:txBody>
+          <a:bodyPr rtlCol="0" anchor="ctr"/>
+          <a:lstStyle/>
+          <a:p>
+            <a:pPr algn="ctr"/>
+          </a:p>
+        </p:txBody>
+      </p:sp>
+      <p:sp>
+        <p:nvSpPr>
+          <p:cNvPr id="19" name="Rectangle 18">
+            <a:hlinkClick r:id="rId13"/>
+          </p:cNvPr>
+          <p:cNvSpPr/>
+          <p:nvPr/>
+        </p:nvSpPr>
+        <p:spPr>
+          <a:xfrm>
+            <a:off x="1188720" y="3008376"/>
+            <a:ext cx="4983480" cy="768096"/>
+          </a:xfrm>
+          <a:prstGeom prst="rect">
+            <a:avLst/>
+          </a:prstGeom>
+          <a:noFill/>
+          <a:ln>
+            <a:noFill/>
+          </a:ln>
+          <a:effectLst/>
+        </p:spPr>
+        <p:style>
+          <a:lnRef idx="1">
+            <a:schemeClr val="accent1"/>
+          </a:lnRef>
+          <a:fillRef idx="3">
+            <a:schemeClr val="accent1"/>
+          </a:fillRef>
+          <a:effectRef idx="2">
+            <a:schemeClr val="accent1"/>
+          </a:effectRef>
+          <a:fontRef idx="minor">
+            <a:schemeClr val="lt1"/>
+          </a:fontRef>
+        </p:style>
+        <p:txBody>
+          <a:bodyPr rtlCol="0" anchor="ctr"/>
+          <a:lstStyle/>
+          <a:p>
+            <a:pPr algn="ctr"/>
+          </a:p>
+        </p:txBody>
+      </p:sp>
+      <p:sp>
+        <p:nvSpPr>
+          <p:cNvPr id="20" name="Rectangle 19">
+            <a:hlinkClick r:id="rId14"/>
+          </p:cNvPr>
+          <p:cNvSpPr/>
+          <p:nvPr/>
+        </p:nvSpPr>
+        <p:spPr>
+          <a:xfrm>
+            <a:off x="1188720" y="3776472"/>
+            <a:ext cx="4983480" cy="768096"/>
+          </a:xfrm>
+          <a:prstGeom prst="rect">
+            <a:avLst/>
+          </a:prstGeom>
+          <a:noFill/>
+          <a:ln>
+            <a:noFill/>
+          </a:ln>
+          <a:effectLst/>
+        </p:spPr>
+        <p:style>
+          <a:lnRef idx="1">
+            <a:schemeClr val="accent1"/>
+          </a:lnRef>
+          <a:fillRef idx="3">
+            <a:schemeClr val="accent1"/>
+          </a:fillRef>
+          <a:effectRef idx="2">
+            <a:schemeClr val="accent1"/>
+          </a:effectRef>
+          <a:fontRef idx="minor">
+            <a:schemeClr val="lt1"/>
+          </a:fontRef>
+        </p:style>
+        <p:txBody>
+          <a:bodyPr rtlCol="0" anchor="ctr"/>
+          <a:lstStyle/>
+          <a:p>
+            <a:pPr algn="ctr"/>
+          </a:p>
+        </p:txBody>
+      </p:sp>
+      <p:sp>
+        <p:nvSpPr>
+          <p:cNvPr id="21" name="Rectangle 20">
+            <a:hlinkClick r:id="rId15"/>
+          </p:cNvPr>
+          <p:cNvSpPr/>
+          <p:nvPr/>
+        </p:nvSpPr>
+        <p:spPr>
+          <a:xfrm>
+            <a:off x="1188720" y="4544568"/>
+            <a:ext cx="4983480" cy="768096"/>
+          </a:xfrm>
+          <a:prstGeom prst="rect">
+            <a:avLst/>
+          </a:prstGeom>
+          <a:noFill/>
+          <a:ln>
+            <a:noFill/>
+          </a:ln>
+          <a:effectLst/>
+        </p:spPr>
+        <p:style>
+          <a:lnRef idx="1">
+            <a:schemeClr val="accent1"/>
+          </a:lnRef>
+          <a:fillRef idx="3">
+            <a:schemeClr val="accent1"/>
+          </a:fillRef>
+          <a:effectRef idx="2">
+            <a:schemeClr val="accent1"/>
+          </a:effectRef>
+          <a:fontRef idx="minor">
+            <a:schemeClr val="lt1"/>
+          </a:fontRef>
+        </p:style>
+        <p:txBody>
+          <a:bodyPr rtlCol="0" anchor="ctr"/>
+          <a:lstStyle/>
+          <a:p>
+            <a:pPr algn="ctr"/>
+          </a:p>
+        </p:txBody>
+      </p:sp>
+      <p:sp>
+        <p:nvSpPr>
+          <p:cNvPr id="22" name="Rectangle 21">
+            <a:hlinkClick r:id="rId16"/>
+          </p:cNvPr>
+          <p:cNvSpPr/>
+          <p:nvPr/>
+        </p:nvSpPr>
+        <p:spPr>
+          <a:xfrm>
+            <a:off x="1188720" y="5312664"/>
+            <a:ext cx="4983480" cy="768096"/>
+          </a:xfrm>
+          <a:prstGeom prst="rect">
+            <a:avLst/>
+          </a:prstGeom>
+          <a:noFill/>
+          <a:ln>
+            <a:noFill/>
+          </a:ln>
+          <a:effectLst/>
+        </p:spPr>
+        <p:style>
+          <a:lnRef idx="1">
+            <a:schemeClr val="accent1"/>
+          </a:lnRef>
+          <a:fillRef idx="3">
+            <a:schemeClr val="accent1"/>
+          </a:fillRef>
+          <a:effectRef idx="2">
+            <a:schemeClr val="accent1"/>
+          </a:effectRef>
+          <a:fontRef idx="minor">
+            <a:schemeClr val="lt1"/>
+          </a:fontRef>
+        </p:style>
+        <p:txBody>
+          <a:bodyPr rtlCol="0" anchor="ctr"/>
+          <a:lstStyle/>
+          <a:p>
+            <a:pPr algn="ctr"/>
+          </a:p>
+        </p:txBody>
+      </p:sp>
+      <p:sp>
+        <p:nvSpPr>
+          <p:cNvPr id="23" name="Rectangle 22">
+            <a:hlinkClick r:id="rId17"/>
+          </p:cNvPr>
+          <p:cNvSpPr/>
+          <p:nvPr/>
+        </p:nvSpPr>
+        <p:spPr>
+          <a:xfrm>
+            <a:off x="1188720" y="6080760"/>
+            <a:ext cx="4983480" cy="768096"/>
+          </a:xfrm>
+          <a:prstGeom prst="rect">
+            <a:avLst/>
+          </a:prstGeom>
+          <a:noFill/>
+          <a:ln>
+            <a:noFill/>
+          </a:ln>
+          <a:effectLst/>
+        </p:spPr>
+        <p:style>
+          <a:lnRef idx="1">
+            <a:schemeClr val="accent1"/>
+          </a:lnRef>
+          <a:fillRef idx="3">
+            <a:schemeClr val="accent1"/>
+          </a:fillRef>
+          <a:effectRef idx="2">
+            <a:schemeClr val="accent1"/>
+          </a:effectRef>
+          <a:fontRef idx="minor">
+            <a:schemeClr val="lt1"/>
+          </a:fontRef>
+        </p:style>
+        <p:txBody>
+          <a:bodyPr rtlCol="0" anchor="ctr"/>
+          <a:lstStyle/>
+          <a:p>
+            <a:pPr algn="ctr"/>
+          </a:p>
+        </p:txBody>
+      </p:sp>
+      <p:sp>
+        <p:nvSpPr>
+          <p:cNvPr id="24" name="Rectangle 23">
+            <a:hlinkClick r:id="rId18"/>
+          </p:cNvPr>
+          <p:cNvSpPr/>
+          <p:nvPr/>
+        </p:nvSpPr>
+        <p:spPr>
+          <a:xfrm>
+            <a:off x="1188720" y="6848856"/>
+            <a:ext cx="4983480" cy="768096"/>
+          </a:xfrm>
+          <a:prstGeom prst="rect">
+            <a:avLst/>
+          </a:prstGeom>
+          <a:noFill/>
+          <a:ln>
+            <a:noFill/>
+          </a:ln>
+          <a:effectLst/>
+        </p:spPr>
+        <p:style>
+          <a:lnRef idx="1">
+            <a:schemeClr val="accent1"/>
+          </a:lnRef>
+          <a:fillRef idx="3">
+            <a:schemeClr val="accent1"/>
+          </a:fillRef>
+          <a:effectRef idx="2">
+            <a:schemeClr val="accent1"/>
+          </a:effectRef>
+          <a:fontRef idx="minor">
+            <a:schemeClr val="lt1"/>
+          </a:fontRef>
+        </p:style>
+        <p:txBody>
+          <a:bodyPr rtlCol="0" anchor="ctr"/>
+          <a:lstStyle/>
+          <a:p>
+            <a:pPr algn="ctr"/>
+          </a:p>
+        </p:txBody>
+      </p:sp>
+      <p:sp>
+        <p:nvSpPr>
+          <p:cNvPr id="25" name="TextBox 24"/>
           <p:cNvSpPr txBox="1"/>
           <p:nvPr/>
         </p:nvSpPr>
         <p:spPr>
           <a:xfrm>
-            <a:off x="12298680" y="1737360"/>
-            <a:ext cx="5486400" cy="411480"/>
+            <a:off x="822960" y="7708392"/>
+            <a:ext cx="1554480" cy="365760"/>
           </a:xfrm>
           <a:prstGeom prst="rect">
             <a:avLst/>
@@ -16619,6 +16837,189 @@
           <a:p>
             <a:pPr algn="l"/>
             <a:r>
+              <a:rPr sz="1300" b="1" i="0">
+                <a:solidFill>
+                  <a:srgbClr val="1F3864"/>
+                </a:solidFill>
+                <a:latin typeface="Calibri"/>
+              </a:rPr>
+              <a:t>Official sources:</a:t>
+            </a:r>
+          </a:p>
+        </p:txBody>
+      </p:sp>
+      <p:sp>
+        <p:nvSpPr>
+          <p:cNvPr id="26" name="TextBox 25">
+            <a:hlinkClick r:id="rId19"/>
+          </p:cNvPr>
+          <p:cNvSpPr txBox="1"/>
+          <p:nvPr/>
+        </p:nvSpPr>
+        <p:spPr>
+          <a:xfrm>
+            <a:off x="2331720" y="7708392"/>
+            <a:ext cx="2459736" cy="365760"/>
+          </a:xfrm>
+          <a:prstGeom prst="rect">
+            <a:avLst/>
+          </a:prstGeom>
+          <a:noFill/>
+        </p:spPr>
+        <p:txBody>
+          <a:bodyPr wrap="none" lIns="18288" rIns="18288">
+            <a:spAutoFit/>
+          </a:bodyPr>
+          <a:lstStyle/>
+          <a:p>
+            <a:r>
+              <a:rPr sz="1300" u="sng">
+                <a:solidFill>
+                  <a:srgbClr val="0563C1"/>
+                </a:solidFill>
+                <a:latin typeface="Calibri"/>
+                <a:hlinkClick r:id="rId19"/>
+              </a:rPr>
+              <a:t>NDPS Act &amp; Sampling Rules 2022</a:t>
+            </a:r>
+          </a:p>
+        </p:txBody>
+      </p:sp>
+      <p:sp>
+        <p:nvSpPr>
+          <p:cNvPr id="27" name="TextBox 26">
+            <a:hlinkClick r:id="rId20"/>
+          </p:cNvPr>
+          <p:cNvSpPr txBox="1"/>
+          <p:nvPr/>
+        </p:nvSpPr>
+        <p:spPr>
+          <a:xfrm>
+            <a:off x="5020056" y="7708392"/>
+            <a:ext cx="2307945" cy="365760"/>
+          </a:xfrm>
+          <a:prstGeom prst="rect">
+            <a:avLst/>
+          </a:prstGeom>
+          <a:noFill/>
+        </p:spPr>
+        <p:txBody>
+          <a:bodyPr wrap="none" lIns="18288" rIns="18288">
+            <a:spAutoFit/>
+          </a:bodyPr>
+          <a:lstStyle/>
+          <a:p>
+            <a:r>
+              <a:rPr sz="1300" u="sng">
+                <a:solidFill>
+                  <a:srgbClr val="0563C1"/>
+                </a:solidFill>
+                <a:latin typeface="Calibri"/>
+                <a:hlinkClick r:id="rId20"/>
+              </a:rPr>
+              <a:t>NCB Field Officers' Handbook</a:t>
+            </a:r>
+          </a:p>
+        </p:txBody>
+      </p:sp>
+      <p:sp>
+        <p:nvSpPr>
+          <p:cNvPr id="28" name="TextBox 27">
+            <a:hlinkClick r:id="rId21"/>
+          </p:cNvPr>
+          <p:cNvSpPr txBox="1"/>
+          <p:nvPr/>
+        </p:nvSpPr>
+        <p:spPr>
+          <a:xfrm>
+            <a:off x="7556601" y="7708392"/>
+            <a:ext cx="2535631" cy="365760"/>
+          </a:xfrm>
+          <a:prstGeom prst="rect">
+            <a:avLst/>
+          </a:prstGeom>
+          <a:noFill/>
+        </p:spPr>
+        <p:txBody>
+          <a:bodyPr wrap="none" lIns="18288" rIns="18288">
+            <a:spAutoFit/>
+          </a:bodyPr>
+          <a:lstStyle/>
+          <a:p>
+            <a:r>
+              <a:rPr sz="1300" u="sng">
+                <a:solidFill>
+                  <a:srgbClr val="0563C1"/>
+                </a:solidFill>
+                <a:latin typeface="Calibri"/>
+                <a:hlinkClick r:id="rId21"/>
+              </a:rPr>
+              <a:t>UNODC Drug Field-Testing Manual</a:t>
+            </a:r>
+          </a:p>
+        </p:txBody>
+      </p:sp>
+      <p:sp>
+        <p:nvSpPr>
+          <p:cNvPr id="29" name="TextBox 28">
+            <a:hlinkClick r:id="rId22"/>
+          </p:cNvPr>
+          <p:cNvSpPr txBox="1"/>
+          <p:nvPr/>
+        </p:nvSpPr>
+        <p:spPr>
+          <a:xfrm>
+            <a:off x="10320832" y="7708392"/>
+            <a:ext cx="1776679" cy="365760"/>
+          </a:xfrm>
+          <a:prstGeom prst="rect">
+            <a:avLst/>
+          </a:prstGeom>
+          <a:noFill/>
+        </p:spPr>
+        <p:txBody>
+          <a:bodyPr wrap="none" lIns="18288" rIns="18288">
+            <a:spAutoFit/>
+          </a:bodyPr>
+          <a:lstStyle/>
+          <a:p>
+            <a:r>
+              <a:rPr sz="1300" u="sng">
+                <a:solidFill>
+                  <a:srgbClr val="0563C1"/>
+                </a:solidFill>
+                <a:latin typeface="Calibri"/>
+                <a:hlinkClick r:id="rId22"/>
+              </a:rPr>
+              <a:t>BNSS / BSA 2023 (MHA)</a:t>
+            </a:r>
+          </a:p>
+        </p:txBody>
+      </p:sp>
+      <p:sp>
+        <p:nvSpPr>
+          <p:cNvPr id="30" name="TextBox 29"/>
+          <p:cNvSpPr txBox="1"/>
+          <p:nvPr/>
+        </p:nvSpPr>
+        <p:spPr>
+          <a:xfrm>
+            <a:off x="12298680" y="1737360"/>
+            <a:ext cx="5486400" cy="411480"/>
+          </a:xfrm>
+          <a:prstGeom prst="rect">
+            <a:avLst/>
+          </a:prstGeom>
+          <a:noFill/>
+        </p:spPr>
+        <p:txBody>
+          <a:bodyPr wrap="square" anchor="t" lIns="45720" rIns="45720" tIns="18288" bIns="18288">
+            <a:spAutoFit/>
+          </a:bodyPr>
+          <a:lstStyle/>
+          <a:p>
+            <a:pPr algn="l"/>
+            <a:r>
               <a:rPr sz="1800" b="1" i="0">
                 <a:solidFill>
                   <a:srgbClr val="1F3864"/>
@@ -16632,7 +17033,7 @@
       </p:sp>
       <p:graphicFrame>
         <p:nvGraphicFramePr>
-          <p:cNvPr id="20" name="Table 19"/>
+          <p:cNvPr id="31" name="Table 30"/>
           <p:cNvGraphicFramePr>
             <a:graphicFrameLocks noGrp="1"/>
           </p:cNvGraphicFramePr>
@@ -17480,7 +17881,7 @@
       </p:graphicFrame>
       <p:sp>
         <p:nvSpPr>
-          <p:cNvPr id="21" name="TextBox 20"/>
+          <p:cNvPr id="32" name="TextBox 31"/>
           <p:cNvSpPr txBox="1"/>
           <p:nvPr/>
         </p:nvSpPr>
@@ -17515,7 +17916,7 @@
       </p:sp>
       <p:sp>
         <p:nvSpPr>
-          <p:cNvPr id="22" name="Rounded Rectangle 21"/>
+          <p:cNvPr id="33" name="Rounded Rectangle 32"/>
           <p:cNvSpPr/>
           <p:nvPr/>
         </p:nvSpPr>
